--- a/output.pptx
+++ b/output.pptx
@@ -3121,8 +3121,8 @@
         </p:nvSpPr>
         <p:spPr>
           <a:xfrm>
-            <a:off x="3723809" y="2142101"/>
-            <a:ext cx="1358392" cy="169333"/>
+            <a:off x="5333322" y="2097058"/>
+            <a:ext cx="1522306" cy="169333"/>
           </a:xfrm>
           <a:prstGeom prst="roundRect">
             <a:avLst>
@@ -3175,8 +3175,8 @@
         </p:nvSpPr>
         <p:spPr>
           <a:xfrm>
-            <a:off x="3723809" y="2142101"/>
-            <a:ext cx="1358392" cy="169333"/>
+            <a:off x="5333322" y="2097058"/>
+            <a:ext cx="1522306" cy="169333"/>
           </a:xfrm>
           <a:prstGeom prst="rect">
             <a:avLst/>
@@ -3216,7 +3216,7 @@
         </p:nvSpPr>
         <p:spPr>
           <a:xfrm>
-            <a:off x="3960876" y="2480768"/>
+            <a:off x="3960876" y="2435725"/>
             <a:ext cx="4267200" cy="1341120"/>
           </a:xfrm>
           <a:prstGeom prst="rect">
@@ -3269,7 +3269,7 @@
         </p:nvSpPr>
         <p:spPr>
           <a:xfrm>
-            <a:off x="3948684" y="3940421"/>
+            <a:off x="3948684" y="3895378"/>
             <a:ext cx="4291584" cy="476842"/>
           </a:xfrm>
           <a:prstGeom prst="rect">
@@ -3328,12 +3328,12 @@
         </p:nvSpPr>
         <p:spPr>
           <a:xfrm>
-            <a:off x="4669558" y="4654330"/>
-            <a:ext cx="915077" cy="820519"/>
+            <a:off x="4669558" y="4609288"/>
+            <a:ext cx="915077" cy="910605"/>
           </a:xfrm>
           <a:prstGeom prst="roundRect">
             <a:avLst>
-              <a:gd name="adj" fmla="val 12382"/>
+              <a:gd name="adj" fmla="val 11157"/>
             </a:avLst>
           </a:prstGeom>
           <a:solidFill>
@@ -3380,7 +3380,7 @@
         </p:nvSpPr>
         <p:spPr>
           <a:xfrm>
-            <a:off x="4881225" y="4789797"/>
+            <a:off x="4881225" y="4744754"/>
             <a:ext cx="508677" cy="379211"/>
           </a:xfrm>
           <a:prstGeom prst="rect">
@@ -3418,7 +3418,7 @@
         </p:nvSpPr>
         <p:spPr>
           <a:xfrm>
-            <a:off x="4906625" y="5214729"/>
+            <a:off x="4906625" y="5169686"/>
             <a:ext cx="432477" cy="169020"/>
           </a:xfrm>
           <a:prstGeom prst="rect">
@@ -3459,8 +3459,8 @@
         </p:nvSpPr>
         <p:spPr>
           <a:xfrm>
-            <a:off x="5703139" y="4654330"/>
-            <a:ext cx="706458" cy="820519"/>
+            <a:off x="5703139" y="4609288"/>
+            <a:ext cx="706458" cy="910605"/>
           </a:xfrm>
           <a:prstGeom prst="roundRect">
             <a:avLst>
@@ -3511,7 +3511,7 @@
         </p:nvSpPr>
         <p:spPr>
           <a:xfrm>
-            <a:off x="5914806" y="4789797"/>
+            <a:off x="5914806" y="4744754"/>
             <a:ext cx="300058" cy="379211"/>
           </a:xfrm>
           <a:prstGeom prst="rect">
@@ -3549,7 +3549,7 @@
         </p:nvSpPr>
         <p:spPr>
           <a:xfrm>
-            <a:off x="5913451" y="5214729"/>
+            <a:off x="5913451" y="5169686"/>
             <a:ext cx="302768" cy="169020"/>
           </a:xfrm>
           <a:prstGeom prst="rect">
@@ -3590,12 +3590,12 @@
         </p:nvSpPr>
         <p:spPr>
           <a:xfrm>
-            <a:off x="6528102" y="4654330"/>
-            <a:ext cx="991290" cy="820519"/>
+            <a:off x="6528102" y="4609288"/>
+            <a:ext cx="991290" cy="910605"/>
           </a:xfrm>
           <a:prstGeom prst="roundRect">
             <a:avLst>
-              <a:gd name="adj" fmla="val 12382"/>
+              <a:gd name="adj" fmla="val 11157"/>
             </a:avLst>
           </a:prstGeom>
           <a:solidFill>
@@ -3642,7 +3642,7 @@
         </p:nvSpPr>
         <p:spPr>
           <a:xfrm>
-            <a:off x="6882185" y="4789797"/>
+            <a:off x="6882185" y="4744754"/>
             <a:ext cx="300058" cy="379211"/>
           </a:xfrm>
           <a:prstGeom prst="rect">
@@ -3680,7 +3680,7 @@
         </p:nvSpPr>
         <p:spPr>
           <a:xfrm>
-            <a:off x="6765168" y="5214729"/>
+            <a:off x="6765168" y="5169686"/>
             <a:ext cx="508690" cy="169020"/>
           </a:xfrm>
           <a:prstGeom prst="rect">
@@ -5060,7 +5060,7 @@
         </p:nvSpPr>
         <p:spPr>
           <a:xfrm>
-            <a:off x="2453809" y="2091645"/>
+            <a:off x="2453809" y="1948558"/>
             <a:ext cx="1473200" cy="169333"/>
           </a:xfrm>
           <a:prstGeom prst="roundRect">
@@ -5114,7 +5114,7 @@
         </p:nvSpPr>
         <p:spPr>
           <a:xfrm>
-            <a:off x="2453809" y="2091645"/>
+            <a:off x="2453809" y="1948558"/>
             <a:ext cx="1473200" cy="169333"/>
           </a:xfrm>
           <a:prstGeom prst="rect">
@@ -5155,7 +5155,7 @@
         </p:nvSpPr>
         <p:spPr>
           <a:xfrm>
-            <a:off x="2453809" y="2379512"/>
+            <a:off x="2453809" y="2236425"/>
             <a:ext cx="7281333" cy="422656"/>
           </a:xfrm>
           <a:prstGeom prst="rect">
@@ -5193,7 +5193,7 @@
         </p:nvSpPr>
         <p:spPr>
           <a:xfrm>
-            <a:off x="2453809" y="2921040"/>
+            <a:off x="2453809" y="2777953"/>
             <a:ext cx="474133" cy="25400"/>
           </a:xfrm>
           <a:prstGeom prst="roundRect">
@@ -5245,8 +5245,8 @@
         </p:nvSpPr>
         <p:spPr>
           <a:xfrm>
-            <a:off x="2420852" y="3064973"/>
-            <a:ext cx="169333" cy="1749607"/>
+            <a:off x="2420852" y="2921886"/>
+            <a:ext cx="169333" cy="2105207"/>
           </a:xfrm>
           <a:prstGeom prst="roundRect">
             <a:avLst>
@@ -5297,12 +5297,12 @@
         </p:nvSpPr>
         <p:spPr>
           <a:xfrm>
-            <a:off x="2454719" y="3064973"/>
-            <a:ext cx="3572040" cy="1749607"/>
+            <a:off x="2454719" y="2921886"/>
+            <a:ext cx="3572040" cy="2105207"/>
           </a:xfrm>
           <a:prstGeom prst="roundRect">
             <a:avLst>
-              <a:gd name="adj" fmla="val 5807"/>
+              <a:gd name="adj" fmla="val 4826"/>
             </a:avLst>
           </a:prstGeom>
           <a:solidFill>
@@ -5349,7 +5349,7 @@
         </p:nvSpPr>
         <p:spPr>
           <a:xfrm>
-            <a:off x="2691786" y="3251240"/>
+            <a:off x="2691786" y="3108153"/>
             <a:ext cx="3131773" cy="266531"/>
           </a:xfrm>
           <a:prstGeom prst="rect">
@@ -5390,7 +5390,7 @@
         </p:nvSpPr>
         <p:spPr>
           <a:xfrm>
-            <a:off x="2691786" y="3563491"/>
+            <a:off x="2691786" y="3420405"/>
             <a:ext cx="3131773" cy="227527"/>
           </a:xfrm>
           <a:prstGeom prst="rect">
@@ -5442,7 +5442,7 @@
         </p:nvSpPr>
         <p:spPr>
           <a:xfrm>
-            <a:off x="2691786" y="3836738"/>
+            <a:off x="2691786" y="3707198"/>
             <a:ext cx="3131773" cy="227527"/>
           </a:xfrm>
           <a:prstGeom prst="rect">
@@ -5494,7 +5494,7 @@
         </p:nvSpPr>
         <p:spPr>
           <a:xfrm>
-            <a:off x="2691786" y="4109986"/>
+            <a:off x="2691786" y="3993992"/>
             <a:ext cx="3131773" cy="227527"/>
           </a:xfrm>
           <a:prstGeom prst="rect">
@@ -5546,7 +5546,7 @@
         </p:nvSpPr>
         <p:spPr>
           <a:xfrm>
-            <a:off x="2691786" y="4383233"/>
+            <a:off x="2691786" y="4280786"/>
             <a:ext cx="3131773" cy="227527"/>
           </a:xfrm>
           <a:prstGeom prst="rect">
@@ -5598,7 +5598,7 @@
         </p:nvSpPr>
         <p:spPr>
           <a:xfrm>
-            <a:off x="2691786" y="4656480"/>
+            <a:off x="2691786" y="4567580"/>
             <a:ext cx="3131773" cy="227527"/>
           </a:xfrm>
           <a:prstGeom prst="rect">
@@ -5650,8 +5650,8 @@
         </p:nvSpPr>
         <p:spPr>
           <a:xfrm>
-            <a:off x="6128325" y="3064973"/>
-            <a:ext cx="169333" cy="1749607"/>
+            <a:off x="6128325" y="2921886"/>
+            <a:ext cx="169333" cy="2105207"/>
           </a:xfrm>
           <a:prstGeom prst="roundRect">
             <a:avLst>
@@ -5702,12 +5702,12 @@
         </p:nvSpPr>
         <p:spPr>
           <a:xfrm>
-            <a:off x="6162192" y="3064973"/>
-            <a:ext cx="3572040" cy="1749607"/>
+            <a:off x="6162192" y="2921886"/>
+            <a:ext cx="3572040" cy="2105207"/>
           </a:xfrm>
           <a:prstGeom prst="roundRect">
             <a:avLst>
-              <a:gd name="adj" fmla="val 5807"/>
+              <a:gd name="adj" fmla="val 4826"/>
             </a:avLst>
           </a:prstGeom>
           <a:solidFill>
@@ -5754,7 +5754,7 @@
         </p:nvSpPr>
         <p:spPr>
           <a:xfrm>
-            <a:off x="6399259" y="3251240"/>
+            <a:off x="6399259" y="3108153"/>
             <a:ext cx="3131773" cy="266531"/>
           </a:xfrm>
           <a:prstGeom prst="rect">
@@ -5795,7 +5795,7 @@
         </p:nvSpPr>
         <p:spPr>
           <a:xfrm>
-            <a:off x="6399259" y="3563491"/>
+            <a:off x="6399259" y="3420405"/>
             <a:ext cx="3131773" cy="227527"/>
           </a:xfrm>
           <a:prstGeom prst="rect">
@@ -5847,7 +5847,7 @@
         </p:nvSpPr>
         <p:spPr>
           <a:xfrm>
-            <a:off x="6399259" y="3836738"/>
+            <a:off x="6399259" y="3707198"/>
             <a:ext cx="3131773" cy="227527"/>
           </a:xfrm>
           <a:prstGeom prst="rect">
@@ -5899,7 +5899,7 @@
         </p:nvSpPr>
         <p:spPr>
           <a:xfrm>
-            <a:off x="6399259" y="4109986"/>
+            <a:off x="6399259" y="3993992"/>
             <a:ext cx="3131773" cy="227527"/>
           </a:xfrm>
           <a:prstGeom prst="rect">
@@ -5951,7 +5951,7 @@
         </p:nvSpPr>
         <p:spPr>
           <a:xfrm>
-            <a:off x="6399259" y="4383233"/>
+            <a:off x="6399259" y="4280786"/>
             <a:ext cx="3131773" cy="227527"/>
           </a:xfrm>
           <a:prstGeom prst="rect">
@@ -6003,7 +6003,7 @@
         </p:nvSpPr>
         <p:spPr>
           <a:xfrm>
-            <a:off x="6399259" y="4656480"/>
+            <a:off x="6399259" y="4567580"/>
             <a:ext cx="3131773" cy="227527"/>
           </a:xfrm>
           <a:prstGeom prst="rect">
@@ -6055,7 +6055,7 @@
         </p:nvSpPr>
         <p:spPr>
           <a:xfrm>
-            <a:off x="2419942" y="5140039"/>
+            <a:off x="2419942" y="5283126"/>
             <a:ext cx="169333" cy="385267"/>
           </a:xfrm>
           <a:prstGeom prst="roundRect">
@@ -6107,7 +6107,7 @@
         </p:nvSpPr>
         <p:spPr>
           <a:xfrm>
-            <a:off x="2453809" y="5140039"/>
+            <a:off x="2453809" y="5283126"/>
             <a:ext cx="7281333" cy="385267"/>
           </a:xfrm>
           <a:prstGeom prst="roundRect">
@@ -6159,7 +6159,7 @@
         </p:nvSpPr>
         <p:spPr>
           <a:xfrm>
-            <a:off x="2453809" y="5140039"/>
+            <a:off x="2453809" y="5283126"/>
             <a:ext cx="7281333" cy="385267"/>
           </a:xfrm>
           <a:prstGeom prst="rect">
@@ -6730,7 +6730,7 @@
         </p:nvSpPr>
         <p:spPr>
           <a:xfrm>
-            <a:off x="2623142" y="1348175"/>
+            <a:off x="2623142" y="1550077"/>
             <a:ext cx="487680" cy="169333"/>
           </a:xfrm>
           <a:prstGeom prst="roundRect">
@@ -6784,7 +6784,7 @@
         </p:nvSpPr>
         <p:spPr>
           <a:xfrm>
-            <a:off x="2623142" y="1348175"/>
+            <a:off x="2623142" y="1550077"/>
             <a:ext cx="487680" cy="169333"/>
           </a:xfrm>
           <a:prstGeom prst="rect">
@@ -6825,7 +6825,7 @@
         </p:nvSpPr>
         <p:spPr>
           <a:xfrm>
-            <a:off x="2623142" y="1636042"/>
+            <a:off x="2623142" y="1837944"/>
             <a:ext cx="6942666" cy="422656"/>
           </a:xfrm>
           <a:prstGeom prst="rect">
@@ -6863,7 +6863,7 @@
         </p:nvSpPr>
         <p:spPr>
           <a:xfrm>
-            <a:off x="2623142" y="2177570"/>
+            <a:off x="2623142" y="2379472"/>
             <a:ext cx="474133" cy="25400"/>
           </a:xfrm>
           <a:prstGeom prst="roundRect">
@@ -6915,7 +6915,7 @@
         </p:nvSpPr>
         <p:spPr>
           <a:xfrm>
-            <a:off x="2624010" y="2321503"/>
+            <a:off x="2624010" y="2523405"/>
             <a:ext cx="3411213" cy="137160"/>
           </a:xfrm>
           <a:prstGeom prst="roundRect">
@@ -6967,7 +6967,7 @@
         </p:nvSpPr>
         <p:spPr>
           <a:xfrm>
-            <a:off x="4251114" y="2504383"/>
+            <a:off x="4251114" y="2706285"/>
             <a:ext cx="157005" cy="137160"/>
           </a:xfrm>
           <a:prstGeom prst="rect">
@@ -7008,7 +7008,7 @@
         </p:nvSpPr>
         <p:spPr>
           <a:xfrm>
-            <a:off x="6153727" y="2321503"/>
+            <a:off x="6153727" y="2523405"/>
             <a:ext cx="3411213" cy="266531"/>
           </a:xfrm>
           <a:prstGeom prst="rect">
@@ -7046,7 +7046,7 @@
         </p:nvSpPr>
         <p:spPr>
           <a:xfrm>
-            <a:off x="6153727" y="2633755"/>
+            <a:off x="6153727" y="2835657"/>
             <a:ext cx="3411213" cy="682581"/>
           </a:xfrm>
           <a:prstGeom prst="rect">
@@ -7087,7 +7087,7 @@
         </p:nvSpPr>
         <p:spPr>
           <a:xfrm>
-            <a:off x="6153727" y="3362056"/>
+            <a:off x="6153727" y="3563958"/>
             <a:ext cx="3411213" cy="358084"/>
           </a:xfrm>
           <a:prstGeom prst="roundRect">
@@ -7141,7 +7141,7 @@
         </p:nvSpPr>
         <p:spPr>
           <a:xfrm>
-            <a:off x="6204440" y="3765860"/>
+            <a:off x="6204440" y="3563958"/>
             <a:ext cx="3309789" cy="358084"/>
           </a:xfrm>
           <a:prstGeom prst="rect">
@@ -7182,7 +7182,7 @@
         </p:nvSpPr>
         <p:spPr>
           <a:xfrm>
-            <a:off x="2624010" y="4379977"/>
+            <a:off x="2624010" y="4178075"/>
             <a:ext cx="3411213" cy="137160"/>
           </a:xfrm>
           <a:prstGeom prst="roundRect">
@@ -7234,7 +7234,7 @@
         </p:nvSpPr>
         <p:spPr>
           <a:xfrm>
-            <a:off x="4251114" y="4562857"/>
+            <a:off x="4251114" y="4360955"/>
             <a:ext cx="157005" cy="137160"/>
           </a:xfrm>
           <a:prstGeom prst="rect">
@@ -7275,7 +7275,7 @@
         </p:nvSpPr>
         <p:spPr>
           <a:xfrm>
-            <a:off x="6153727" y="4379977"/>
+            <a:off x="6153727" y="4178075"/>
             <a:ext cx="3411213" cy="266531"/>
           </a:xfrm>
           <a:prstGeom prst="rect">
@@ -7324,7 +7324,7 @@
         </p:nvSpPr>
         <p:spPr>
           <a:xfrm>
-            <a:off x="6153727" y="4692228"/>
+            <a:off x="6153727" y="4490326"/>
             <a:ext cx="3411213" cy="455054"/>
           </a:xfrm>
           <a:prstGeom prst="rect">
@@ -7409,7 +7409,7 @@
         </p:nvSpPr>
         <p:spPr>
           <a:xfrm>
-            <a:off x="2624010" y="5403315"/>
+            <a:off x="2624010" y="5201413"/>
             <a:ext cx="3411213" cy="137160"/>
           </a:xfrm>
           <a:prstGeom prst="roundRect">
@@ -7461,7 +7461,7 @@
         </p:nvSpPr>
         <p:spPr>
           <a:xfrm>
-            <a:off x="4251114" y="5586195"/>
+            <a:off x="4251114" y="5384293"/>
             <a:ext cx="157005" cy="137160"/>
           </a:xfrm>
           <a:prstGeom prst="rect">
@@ -7502,7 +7502,7 @@
         </p:nvSpPr>
         <p:spPr>
           <a:xfrm>
-            <a:off x="6153727" y="5403315"/>
+            <a:off x="6153727" y="5201413"/>
             <a:ext cx="3411213" cy="137160"/>
           </a:xfrm>
           <a:prstGeom prst="rect">
@@ -7540,7 +7540,7 @@
         </p:nvSpPr>
         <p:spPr>
           <a:xfrm>
-            <a:off x="6153727" y="5586195"/>
+            <a:off x="6153727" y="5384293"/>
             <a:ext cx="3411213" cy="682581"/>
           </a:xfrm>
           <a:prstGeom prst="rect">
@@ -8078,7 +8078,7 @@
         </p:nvSpPr>
         <p:spPr>
           <a:xfrm>
-            <a:off x="2116137" y="1552797"/>
+            <a:off x="2116137" y="1782082"/>
             <a:ext cx="3919086" cy="845100"/>
           </a:xfrm>
           <a:prstGeom prst="rect">
@@ -8116,7 +8116,7 @@
         </p:nvSpPr>
         <p:spPr>
           <a:xfrm>
-            <a:off x="6741590" y="1552797"/>
+            <a:off x="6741590" y="1782082"/>
             <a:ext cx="3919086" cy="234298"/>
           </a:xfrm>
           <a:prstGeom prst="roundRect">
@@ -8170,7 +8170,7 @@
         </p:nvSpPr>
         <p:spPr>
           <a:xfrm>
-            <a:off x="7610351" y="1832816"/>
+            <a:off x="7610351" y="2062100"/>
             <a:ext cx="1005840" cy="234298"/>
           </a:xfrm>
           <a:prstGeom prst="rect">
@@ -8211,7 +8211,7 @@
         </p:nvSpPr>
         <p:spPr>
           <a:xfrm>
-            <a:off x="2115142" y="2653930"/>
+            <a:off x="2115142" y="2883214"/>
             <a:ext cx="474133" cy="25400"/>
           </a:xfrm>
           <a:prstGeom prst="roundRect">
@@ -8263,12 +8263,12 @@
         </p:nvSpPr>
         <p:spPr>
           <a:xfrm>
-            <a:off x="2116137" y="2797863"/>
-            <a:ext cx="1925685" cy="761471"/>
+            <a:off x="2116137" y="3027148"/>
+            <a:ext cx="1925685" cy="1373495"/>
           </a:xfrm>
           <a:prstGeom prst="roundRect">
             <a:avLst>
-              <a:gd name="adj" fmla="val 13342"/>
+              <a:gd name="adj" fmla="val 7397"/>
             </a:avLst>
           </a:prstGeom>
           <a:solidFill>
@@ -8315,8 +8315,8 @@
         </p:nvSpPr>
         <p:spPr>
           <a:xfrm>
-            <a:off x="457200" y="3255063"/>
-            <a:ext cx="11274552" cy="274320"/>
+            <a:off x="2277004" y="3162614"/>
+            <a:ext cx="329861" cy="137160"/>
           </a:xfrm>
           <a:prstGeom prst="rect">
             <a:avLst/>
@@ -8334,6 +8334,14 @@
                 <a:spcPct val="120000"/>
               </a:lnSpc>
             </a:pPr>
+            <a:r>
+              <a:rPr sz="1060" b="1">
+                <a:latin typeface="Microsoft YaHei"/>
+                <a:ea typeface="Microsoft YaHei"/>
+                <a:cs typeface="Microsoft YaHei"/>
+              </a:rPr>
+              <a:t>深色</a:t>
+            </a:r>
           </a:p>
         </p:txBody>
       </p:sp>
@@ -8345,8 +8353,8 @@
         </p:nvSpPr>
         <p:spPr>
           <a:xfrm>
-            <a:off x="955540" y="2933330"/>
-            <a:ext cx="4263813" cy="333164"/>
+            <a:off x="2652585" y="3162614"/>
+            <a:ext cx="290576" cy="137160"/>
           </a:xfrm>
           <a:prstGeom prst="rect">
             <a:avLst/>
@@ -8354,8 +8362,8 @@
           <a:noFill/>
         </p:spPr>
         <p:txBody>
-          <a:bodyPr wrap="square" lIns="0" rIns="0" tIns="0" bIns="0">
-            <a:spAutoFit/>
+          <a:bodyPr wrap="none" lIns="0" rIns="0" tIns="0" bIns="0">
+            <a:normAutofit/>
           </a:bodyPr>
           <a:lstStyle/>
           <a:p>
@@ -8365,48 +8373,7 @@
               </a:lnSpc>
             </a:pPr>
             <a:r>
-              <a:rPr sz="1200" b="0">
-                <a:solidFill>
-                  <a:srgbClr val="1E293B"/>
-                </a:solidFill>
-                <a:latin typeface="Microsoft YaHei"/>
-                <a:ea typeface="Microsoft YaHei"/>
-                <a:cs typeface="Microsoft YaHei"/>
-              </a:rPr>
-              <a:t>Bold SignalElectric StudioCreative VoltageDark Botanical</a:t>
-            </a:r>
-          </a:p>
-        </p:txBody>
-      </p:sp>
-      <p:sp>
-        <p:nvSpPr>
-          <p:cNvPr id="9" name="TextBox 8"/>
-          <p:cNvSpPr txBox="1"/>
-          <p:nvPr/>
-        </p:nvSpPr>
-        <p:spPr>
-          <a:xfrm>
-            <a:off x="2277004" y="3312215"/>
-            <a:ext cx="1612418" cy="156018"/>
-          </a:xfrm>
-          <a:prstGeom prst="rect">
-            <a:avLst/>
-          </a:prstGeom>
-          <a:noFill/>
-        </p:spPr>
-        <p:txBody>
-          <a:bodyPr wrap="none" lIns="0" rIns="0" tIns="0" bIns="0">
-            <a:normAutofit/>
-          </a:bodyPr>
-          <a:lstStyle/>
-          <a:p>
-            <a:pPr>
-              <a:lnSpc>
-                <a:spcPct val="160000"/>
-              </a:lnSpc>
-            </a:pPr>
-            <a:r>
-              <a:rPr sz="860" b="0">
+              <a:rPr sz="840" b="0">
                 <a:solidFill>
                   <a:srgbClr val="64748B"/>
                 </a:solidFill>
@@ -8414,29 +8381,29 @@
                 <a:ea typeface="Microsoft YaHei"/>
                 <a:cs typeface="Microsoft YaHei"/>
               </a:rPr>
-              <a:t>演讲 · 品牌 · 技术分享</a:t>
-            </a:r>
-          </a:p>
-        </p:txBody>
-      </p:sp>
-      <p:sp>
-        <p:nvSpPr>
-          <p:cNvPr id="10" name="Rounded Rectangle 9"/>
-          <p:cNvSpPr/>
-          <p:nvPr/>
-        </p:nvSpPr>
-        <p:spPr>
-          <a:xfrm>
-            <a:off x="4126468" y="2797863"/>
-            <a:ext cx="1925685" cy="872526"/>
+              <a:t>4 种</a:t>
+            </a:r>
+          </a:p>
+        </p:txBody>
+      </p:sp>
+      <p:sp>
+        <p:nvSpPr>
+          <p:cNvPr id="9" name="Rounded Rectangle 8"/>
+          <p:cNvSpPr/>
+          <p:nvPr/>
+        </p:nvSpPr>
+        <p:spPr>
+          <a:xfrm>
+            <a:off x="2277004" y="3345494"/>
+            <a:ext cx="704223" cy="221811"/>
           </a:xfrm>
           <a:prstGeom prst="roundRect">
             <a:avLst>
-              <a:gd name="adj" fmla="val 11644"/>
+              <a:gd name="adj" fmla="val 45804"/>
             </a:avLst>
           </a:prstGeom>
           <a:solidFill>
-            <a:srgbClr val="FAFDFF"/>
+            <a:srgbClr val="DEE6ED"/>
           </a:solidFill>
           <a:ln>
             <a:noFill/>
@@ -8473,14 +8440,14 @@
       </p:sp>
       <p:sp>
         <p:nvSpPr>
-          <p:cNvPr id="11" name="TextBox 10"/>
+          <p:cNvPr id="10" name="TextBox 9"/>
           <p:cNvSpPr txBox="1"/>
           <p:nvPr/>
         </p:nvSpPr>
         <p:spPr>
           <a:xfrm>
-            <a:off x="457200" y="3255063"/>
-            <a:ext cx="11274552" cy="274320"/>
+            <a:off x="2277004" y="3345494"/>
+            <a:ext cx="1612418" cy="221811"/>
           </a:xfrm>
           <a:prstGeom prst="rect">
             <a:avLst/>
@@ -8488,7 +8455,7 @@
           <a:noFill/>
         </p:spPr>
         <p:txBody>
-          <a:bodyPr wrap="none" lIns="0" rIns="0" tIns="0" bIns="0">
+          <a:bodyPr wrap="none" lIns="84666" rIns="84666" tIns="25400" bIns="25400">
             <a:normAutofit/>
           </a:bodyPr>
           <a:lstStyle/>
@@ -8498,131 +8465,38 @@
                 <a:spcPct val="120000"/>
               </a:lnSpc>
             </a:pPr>
-          </a:p>
-        </p:txBody>
-      </p:sp>
-      <p:sp>
-        <p:nvSpPr>
-          <p:cNvPr id="12" name="TextBox 11"/>
-          <p:cNvSpPr txBox="1"/>
-          <p:nvPr/>
-        </p:nvSpPr>
-        <p:spPr>
-          <a:xfrm>
-            <a:off x="2495124" y="2933330"/>
-            <a:ext cx="5205306" cy="444219"/>
-          </a:xfrm>
-          <a:prstGeom prst="rect">
-            <a:avLst/>
-          </a:prstGeom>
-          <a:noFill/>
-        </p:spPr>
-        <p:txBody>
-          <a:bodyPr wrap="none" lIns="0" rIns="0" tIns="0" bIns="0">
-            <a:normAutofit/>
-          </a:bodyPr>
-          <a:lstStyle/>
-          <a:p>
-            <a:pPr>
-              <a:lnSpc>
-                <a:spcPct val="120000"/>
-              </a:lnSpc>
-            </a:pPr>
-            <a:r>
-              <a:rPr sz="1200" b="0">
-                <a:solidFill>
-                  <a:srgbClr val="0C4A6E"/>
-                </a:solidFill>
-                <a:latin typeface="Microsoft YaHei"/>
-                <a:ea typeface="Microsoft YaHei"/>
-                <a:cs typeface="Microsoft YaHei"/>
-              </a:rPr>
-              <a:t xml:space="preserve">Blue Sky </a:t>
-            </a:r>
-            <a:r>
-              <a:rPr sz="1200" b="1">
-                <a:solidFill>
-                  <a:srgbClr val="065F46"/>
-                </a:solidFill>
-                <a:latin typeface="Microsoft YaHei"/>
-                <a:ea typeface="Microsoft YaHei"/>
-                <a:cs typeface="Microsoft YaHei"/>
-              </a:rPr>
-              <a:t>当前</a:t>
-            </a:r>
-            <a:r>
-              <a:rPr sz="1200" b="0">
-                <a:solidFill>
-                  <a:srgbClr val="0C4A6E"/>
-                </a:solidFill>
-                <a:latin typeface="Microsoft YaHei"/>
-                <a:ea typeface="Microsoft YaHei"/>
-                <a:cs typeface="Microsoft YaHei"/>
-              </a:rPr>
-              <a:t>Notebook TabsPastel GeometrySplit PastelVintage Editorial</a:t>
-            </a:r>
-          </a:p>
-        </p:txBody>
-      </p:sp>
-      <p:sp>
-        <p:nvSpPr>
-          <p:cNvPr id="13" name="TextBox 12"/>
-          <p:cNvSpPr txBox="1"/>
-          <p:nvPr/>
-        </p:nvSpPr>
-        <p:spPr>
-          <a:xfrm>
-            <a:off x="4287334" y="3423269"/>
-            <a:ext cx="1612418" cy="156018"/>
-          </a:xfrm>
-          <a:prstGeom prst="rect">
-            <a:avLst/>
-          </a:prstGeom>
-          <a:noFill/>
-        </p:spPr>
-        <p:txBody>
-          <a:bodyPr wrap="none" lIns="0" rIns="0" tIns="0" bIns="0">
-            <a:normAutofit/>
-          </a:bodyPr>
-          <a:lstStyle/>
-          <a:p>
-            <a:pPr>
-              <a:lnSpc>
-                <a:spcPct val="160000"/>
-              </a:lnSpc>
-            </a:pPr>
-            <a:r>
-              <a:rPr sz="860" b="0">
-                <a:solidFill>
-                  <a:srgbClr val="64748B"/>
-                </a:solidFill>
-                <a:latin typeface="Microsoft YaHei"/>
-                <a:ea typeface="Microsoft YaHei"/>
-                <a:cs typeface="Microsoft YaHei"/>
-              </a:rPr>
-              <a:t>教育 · 内部 · 创意</a:t>
-            </a:r>
-          </a:p>
-        </p:txBody>
-      </p:sp>
-      <p:sp>
-        <p:nvSpPr>
-          <p:cNvPr id="14" name="Rounded Rectangle 13"/>
-          <p:cNvSpPr/>
-          <p:nvPr/>
-        </p:nvSpPr>
-        <p:spPr>
-          <a:xfrm>
-            <a:off x="6724661" y="2797863"/>
-            <a:ext cx="1925685" cy="761471"/>
+            <a:r>
+              <a:rPr sz="919" b="0">
+                <a:solidFill>
+                  <a:srgbClr val="1E293B"/>
+                </a:solidFill>
+                <a:latin typeface="Microsoft YaHei"/>
+                <a:ea typeface="Microsoft YaHei"/>
+                <a:cs typeface="Microsoft YaHei"/>
+              </a:rPr>
+              <a:t>Bold Signal</a:t>
+            </a:r>
+          </a:p>
+        </p:txBody>
+      </p:sp>
+      <p:sp>
+        <p:nvSpPr>
+          <p:cNvPr id="11" name="Rounded Rectangle 10"/>
+          <p:cNvSpPr/>
+          <p:nvPr/>
+        </p:nvSpPr>
+        <p:spPr>
+          <a:xfrm>
+            <a:off x="2277004" y="3613026"/>
+            <a:ext cx="1620885" cy="137160"/>
           </a:xfrm>
           <a:prstGeom prst="roundRect">
             <a:avLst>
-              <a:gd name="adj" fmla="val 13342"/>
+              <a:gd name="adj" fmla="val 50000"/>
             </a:avLst>
           </a:prstGeom>
           <a:solidFill>
-            <a:srgbClr val="FAFDFF"/>
+            <a:srgbClr val="DEE6ED"/>
           </a:solidFill>
           <a:ln>
             <a:noFill/>
@@ -8659,14 +8533,14 @@
       </p:sp>
       <p:sp>
         <p:nvSpPr>
-          <p:cNvPr id="15" name="TextBox 14"/>
+          <p:cNvPr id="12" name="TextBox 11"/>
           <p:cNvSpPr txBox="1"/>
           <p:nvPr/>
         </p:nvSpPr>
         <p:spPr>
           <a:xfrm>
-            <a:off x="457200" y="3255063"/>
-            <a:ext cx="11274552" cy="274320"/>
+            <a:off x="2277004" y="3613026"/>
+            <a:ext cx="1612418" cy="137160"/>
           </a:xfrm>
           <a:prstGeom prst="rect">
             <a:avLst/>
@@ -8674,7 +8548,7 @@
           <a:noFill/>
         </p:spPr>
         <p:txBody>
-          <a:bodyPr wrap="none" lIns="0" rIns="0" tIns="0" bIns="0">
+          <a:bodyPr wrap="none" lIns="84666" rIns="84666" tIns="25400" bIns="25400">
             <a:normAutofit/>
           </a:bodyPr>
           <a:lstStyle/>
@@ -8684,109 +8558,38 @@
                 <a:spcPct val="120000"/>
               </a:lnSpc>
             </a:pPr>
-          </a:p>
-        </p:txBody>
-      </p:sp>
-      <p:sp>
-        <p:nvSpPr>
-          <p:cNvPr id="16" name="TextBox 15"/>
-          <p:cNvSpPr txBox="1"/>
-          <p:nvPr/>
-        </p:nvSpPr>
-        <p:spPr>
-          <a:xfrm>
-            <a:off x="5311481" y="2933330"/>
-            <a:ext cx="3593253" cy="333164"/>
-          </a:xfrm>
-          <a:prstGeom prst="rect">
-            <a:avLst/>
-          </a:prstGeom>
-          <a:noFill/>
-        </p:spPr>
-        <p:txBody>
-          <a:bodyPr wrap="square" lIns="0" rIns="0" tIns="0" bIns="0">
-            <a:spAutoFit/>
-          </a:bodyPr>
-          <a:lstStyle/>
-          <a:p>
-            <a:pPr>
-              <a:lnSpc>
-                <a:spcPct val="120000"/>
-              </a:lnSpc>
-            </a:pPr>
-            <a:r>
-              <a:rPr sz="1200" b="0">
-                <a:solidFill>
-                  <a:srgbClr val="4C1D95"/>
-                </a:solidFill>
-                <a:latin typeface="Microsoft YaHei"/>
-                <a:ea typeface="Microsoft YaHei"/>
-                <a:cs typeface="Microsoft YaHei"/>
-              </a:rPr>
-              <a:t>Neon CyberTerminal GreenSwiss ModernPaper &amp; Ink</a:t>
-            </a:r>
-          </a:p>
-        </p:txBody>
-      </p:sp>
-      <p:sp>
-        <p:nvSpPr>
-          <p:cNvPr id="17" name="TextBox 16"/>
-          <p:cNvSpPr txBox="1"/>
-          <p:nvPr/>
-        </p:nvSpPr>
-        <p:spPr>
-          <a:xfrm>
-            <a:off x="6885528" y="3312215"/>
-            <a:ext cx="1612418" cy="156018"/>
-          </a:xfrm>
-          <a:prstGeom prst="rect">
-            <a:avLst/>
-          </a:prstGeom>
-          <a:noFill/>
-        </p:spPr>
-        <p:txBody>
-          <a:bodyPr wrap="none" lIns="0" rIns="0" tIns="0" bIns="0">
-            <a:normAutofit/>
-          </a:bodyPr>
-          <a:lstStyle/>
-          <a:p>
-            <a:pPr>
-              <a:lnSpc>
-                <a:spcPct val="160000"/>
-              </a:lnSpc>
-            </a:pPr>
-            <a:r>
-              <a:rPr sz="860" b="0">
-                <a:solidFill>
-                  <a:srgbClr val="64748B"/>
-                </a:solidFill>
-                <a:latin typeface="Microsoft YaHei"/>
-                <a:ea typeface="Microsoft YaHei"/>
-                <a:cs typeface="Microsoft YaHei"/>
-              </a:rPr>
-              <a:t>开发 · 学术 · 极简</a:t>
-            </a:r>
-          </a:p>
-        </p:txBody>
-      </p:sp>
-      <p:sp>
-        <p:nvSpPr>
-          <p:cNvPr id="18" name="Rounded Rectangle 17"/>
-          <p:cNvSpPr/>
-          <p:nvPr/>
-        </p:nvSpPr>
-        <p:spPr>
-          <a:xfrm>
-            <a:off x="8147129" y="2797863"/>
-            <a:ext cx="1925685" cy="920329"/>
+            <a:r>
+              <a:rPr sz="919" b="0">
+                <a:solidFill>
+                  <a:srgbClr val="1E293B"/>
+                </a:solidFill>
+                <a:latin typeface="Microsoft YaHei"/>
+                <a:ea typeface="Microsoft YaHei"/>
+                <a:cs typeface="Microsoft YaHei"/>
+              </a:rPr>
+              <a:t>Electric Studio</a:t>
+            </a:r>
+          </a:p>
+        </p:txBody>
+      </p:sp>
+      <p:sp>
+        <p:nvSpPr>
+          <p:cNvPr id="13" name="Rounded Rectangle 12"/>
+          <p:cNvSpPr/>
+          <p:nvPr/>
+        </p:nvSpPr>
+        <p:spPr>
+          <a:xfrm>
+            <a:off x="2277004" y="3795906"/>
+            <a:ext cx="1620885" cy="137160"/>
           </a:xfrm>
           <a:prstGeom prst="roundRect">
             <a:avLst>
-              <a:gd name="adj" fmla="val 11039"/>
+              <a:gd name="adj" fmla="val 50000"/>
             </a:avLst>
           </a:prstGeom>
           <a:solidFill>
-            <a:srgbClr val="FAFDFF"/>
+            <a:srgbClr val="DEE6ED"/>
           </a:solidFill>
           <a:ln>
             <a:noFill/>
@@ -8823,14 +8626,14 @@
       </p:sp>
       <p:sp>
         <p:nvSpPr>
-          <p:cNvPr id="19" name="TextBox 18"/>
+          <p:cNvPr id="14" name="TextBox 13"/>
           <p:cNvSpPr txBox="1"/>
           <p:nvPr/>
         </p:nvSpPr>
         <p:spPr>
           <a:xfrm>
-            <a:off x="457200" y="3255063"/>
-            <a:ext cx="11274552" cy="1965960"/>
+            <a:off x="2277004" y="3795906"/>
+            <a:ext cx="1612418" cy="137160"/>
           </a:xfrm>
           <a:prstGeom prst="rect">
             <a:avLst/>
@@ -8838,7 +8641,7 @@
           <a:noFill/>
         </p:spPr>
         <p:txBody>
-          <a:bodyPr wrap="none" lIns="0" rIns="0" tIns="0" bIns="0">
+          <a:bodyPr wrap="none" lIns="84666" rIns="84666" tIns="25400" bIns="25400">
             <a:normAutofit/>
           </a:bodyPr>
           <a:lstStyle/>
@@ -8848,68 +8651,38 @@
                 <a:spcPct val="120000"/>
               </a:lnSpc>
             </a:pPr>
-          </a:p>
-        </p:txBody>
-      </p:sp>
-      <p:sp>
-        <p:nvSpPr>
-          <p:cNvPr id="20" name="TextBox 19"/>
-          <p:cNvSpPr txBox="1"/>
-          <p:nvPr/>
-        </p:nvSpPr>
-        <p:spPr>
-          <a:xfrm>
-            <a:off x="5235625" y="2933330"/>
-            <a:ext cx="6953326" cy="666329"/>
-          </a:xfrm>
-          <a:prstGeom prst="rect">
-            <a:avLst/>
-          </a:prstGeom>
-          <a:noFill/>
-        </p:spPr>
-        <p:txBody>
-          <a:bodyPr wrap="none" lIns="0" rIns="0" tIns="0" bIns="0">
-            <a:normAutofit/>
-          </a:bodyPr>
-          <a:lstStyle/>
-          <a:p>
-            <a:pPr>
-              <a:lnSpc>
-                <a:spcPct val="120000"/>
-              </a:lnSpc>
-            </a:pPr>
-            <a:r>
-              <a:rPr sz="1200" b="0">
-                <a:solidFill>
-                  <a:srgbClr val="1E3A8A"/>
-                </a:solidFill>
-                <a:latin typeface="Microsoft YaHei"/>
-                <a:ea typeface="Microsoft YaHei"/>
-                <a:cs typeface="Microsoft YaHei"/>
-              </a:rPr>
-              <a:t>Aurora MeshEnterprise DarkGlassmorphismNeo-BrutalismChinese ChanData StoryModern NewspaperNeo-Retro Dev</a:t>
-            </a:r>
-          </a:p>
-        </p:txBody>
-      </p:sp>
-      <p:sp>
-        <p:nvSpPr>
-          <p:cNvPr id="21" name="Rounded Rectangle 20"/>
-          <p:cNvSpPr/>
-          <p:nvPr/>
-        </p:nvSpPr>
-        <p:spPr>
-          <a:xfrm>
-            <a:off x="2081275" y="5477055"/>
-            <a:ext cx="169333" cy="587098"/>
+            <a:r>
+              <a:rPr sz="919" b="0">
+                <a:solidFill>
+                  <a:srgbClr val="1E293B"/>
+                </a:solidFill>
+                <a:latin typeface="Microsoft YaHei"/>
+                <a:ea typeface="Microsoft YaHei"/>
+                <a:cs typeface="Microsoft YaHei"/>
+              </a:rPr>
+              <a:t>Creative Voltage</a:t>
+            </a:r>
+          </a:p>
+        </p:txBody>
+      </p:sp>
+      <p:sp>
+        <p:nvSpPr>
+          <p:cNvPr id="15" name="Rounded Rectangle 14"/>
+          <p:cNvSpPr/>
+          <p:nvPr/>
+        </p:nvSpPr>
+        <p:spPr>
+          <a:xfrm>
+            <a:off x="2277004" y="3978786"/>
+            <a:ext cx="876333" cy="221811"/>
           </a:xfrm>
           <a:prstGeom prst="roundRect">
             <a:avLst>
-              <a:gd name="adj" fmla="val 50000"/>
+              <a:gd name="adj" fmla="val 45804"/>
             </a:avLst>
           </a:prstGeom>
           <a:solidFill>
-            <a:srgbClr val="2563EB"/>
+            <a:srgbClr val="DEE6ED"/>
           </a:solidFill>
           <a:ln>
             <a:noFill/>
@@ -8946,22 +8719,104 @@
       </p:sp>
       <p:sp>
         <p:nvSpPr>
-          <p:cNvPr id="22" name="Rounded Rectangle 21"/>
-          <p:cNvSpPr/>
-          <p:nvPr/>
-        </p:nvSpPr>
-        <p:spPr>
-          <a:xfrm>
-            <a:off x="2115142" y="5477055"/>
-            <a:ext cx="7958666" cy="587098"/>
+          <p:cNvPr id="16" name="TextBox 15"/>
+          <p:cNvSpPr txBox="1"/>
+          <p:nvPr/>
+        </p:nvSpPr>
+        <p:spPr>
+          <a:xfrm>
+            <a:off x="2277004" y="3978786"/>
+            <a:ext cx="1612418" cy="221811"/>
+          </a:xfrm>
+          <a:prstGeom prst="rect">
+            <a:avLst/>
+          </a:prstGeom>
+          <a:noFill/>
+        </p:spPr>
+        <p:txBody>
+          <a:bodyPr wrap="none" lIns="84666" rIns="84666" tIns="25400" bIns="25400">
+            <a:normAutofit/>
+          </a:bodyPr>
+          <a:lstStyle/>
+          <a:p>
+            <a:pPr>
+              <a:lnSpc>
+                <a:spcPct val="120000"/>
+              </a:lnSpc>
+            </a:pPr>
+            <a:r>
+              <a:rPr sz="919" b="0">
+                <a:solidFill>
+                  <a:srgbClr val="1E293B"/>
+                </a:solidFill>
+                <a:latin typeface="Microsoft YaHei"/>
+                <a:ea typeface="Microsoft YaHei"/>
+                <a:cs typeface="Microsoft YaHei"/>
+              </a:rPr>
+              <a:t>Dark Botanical</a:t>
+            </a:r>
+          </a:p>
+        </p:txBody>
+      </p:sp>
+      <p:sp>
+        <p:nvSpPr>
+          <p:cNvPr id="17" name="TextBox 16"/>
+          <p:cNvSpPr txBox="1"/>
+          <p:nvPr/>
+        </p:nvSpPr>
+        <p:spPr>
+          <a:xfrm>
+            <a:off x="2277004" y="4246318"/>
+            <a:ext cx="1612418" cy="156018"/>
+          </a:xfrm>
+          <a:prstGeom prst="rect">
+            <a:avLst/>
+          </a:prstGeom>
+          <a:noFill/>
+        </p:spPr>
+        <p:txBody>
+          <a:bodyPr wrap="none" lIns="0" rIns="0" tIns="0" bIns="0">
+            <a:normAutofit/>
+          </a:bodyPr>
+          <a:lstStyle/>
+          <a:p>
+            <a:pPr>
+              <a:lnSpc>
+                <a:spcPct val="160000"/>
+              </a:lnSpc>
+            </a:pPr>
+            <a:r>
+              <a:rPr sz="860" b="0">
+                <a:solidFill>
+                  <a:srgbClr val="64748B"/>
+                </a:solidFill>
+                <a:latin typeface="Microsoft YaHei"/>
+                <a:ea typeface="Microsoft YaHei"/>
+                <a:cs typeface="Microsoft YaHei"/>
+              </a:rPr>
+              <a:t>演讲 · 品牌 · 技术分享</a:t>
+            </a:r>
+          </a:p>
+        </p:txBody>
+      </p:sp>
+      <p:sp>
+        <p:nvSpPr>
+          <p:cNvPr id="18" name="Rounded Rectangle 17"/>
+          <p:cNvSpPr/>
+          <p:nvPr/>
+        </p:nvSpPr>
+        <p:spPr>
+          <a:xfrm>
+            <a:off x="4126468" y="3027148"/>
+            <a:ext cx="1925685" cy="1556375"/>
           </a:xfrm>
           <a:prstGeom prst="roundRect">
             <a:avLst>
-              <a:gd name="adj" fmla="val 17305"/>
+              <a:gd name="adj" fmla="val 6527"/>
             </a:avLst>
           </a:prstGeom>
           <a:solidFill>
-            <a:srgbClr val="E1EEFD"/>
+            <a:srgbClr val="FAFDFF"/>
           </a:solidFill>
           <a:ln>
             <a:noFill/>
@@ -8998,33 +8853,121 @@
       </p:sp>
       <p:sp>
         <p:nvSpPr>
-          <p:cNvPr id="23" name="Rectangle 22"/>
-          <p:cNvSpPr/>
-          <p:nvPr/>
-        </p:nvSpPr>
-        <p:spPr>
-          <a:xfrm>
-            <a:off x="10065342" y="5477055"/>
-            <a:ext cx="8466" cy="587098"/>
+          <p:cNvPr id="19" name="TextBox 18"/>
+          <p:cNvSpPr txBox="1"/>
+          <p:nvPr/>
+        </p:nvSpPr>
+        <p:spPr>
+          <a:xfrm>
+            <a:off x="4287334" y="3162614"/>
+            <a:ext cx="329861" cy="137160"/>
           </a:xfrm>
           <a:prstGeom prst="rect">
             <a:avLst/>
           </a:prstGeom>
+          <a:noFill/>
+        </p:spPr>
+        <p:txBody>
+          <a:bodyPr wrap="none" lIns="0" rIns="0" tIns="0" bIns="0">
+            <a:normAutofit/>
+          </a:bodyPr>
+          <a:lstStyle/>
+          <a:p>
+            <a:pPr>
+              <a:lnSpc>
+                <a:spcPct val="120000"/>
+              </a:lnSpc>
+            </a:pPr>
+            <a:r>
+              <a:rPr sz="1060" b="1">
+                <a:latin typeface="Microsoft YaHei"/>
+                <a:ea typeface="Microsoft YaHei"/>
+                <a:cs typeface="Microsoft YaHei"/>
+              </a:rPr>
+              <a:t>浅色</a:t>
+            </a:r>
+          </a:p>
+        </p:txBody>
+      </p:sp>
+      <p:sp>
+        <p:nvSpPr>
+          <p:cNvPr id="20" name="TextBox 19"/>
+          <p:cNvSpPr txBox="1"/>
+          <p:nvPr/>
+        </p:nvSpPr>
+        <p:spPr>
+          <a:xfrm>
+            <a:off x="4662916" y="3162614"/>
+            <a:ext cx="290576" cy="137160"/>
+          </a:xfrm>
+          <a:prstGeom prst="rect">
+            <a:avLst/>
+          </a:prstGeom>
+          <a:noFill/>
+        </p:spPr>
+        <p:txBody>
+          <a:bodyPr wrap="none" lIns="0" rIns="0" tIns="0" bIns="0">
+            <a:normAutofit/>
+          </a:bodyPr>
+          <a:lstStyle/>
+          <a:p>
+            <a:pPr>
+              <a:lnSpc>
+                <a:spcPct val="120000"/>
+              </a:lnSpc>
+            </a:pPr>
+            <a:r>
+              <a:rPr sz="840" b="0">
+                <a:solidFill>
+                  <a:srgbClr val="64748B"/>
+                </a:solidFill>
+                <a:latin typeface="Microsoft YaHei"/>
+                <a:ea typeface="Microsoft YaHei"/>
+                <a:cs typeface="Microsoft YaHei"/>
+              </a:rPr>
+              <a:t>5 种</a:t>
+            </a:r>
+          </a:p>
+        </p:txBody>
+      </p:sp>
+      <p:sp>
+        <p:nvSpPr>
+          <p:cNvPr id="21" name="Rounded Rectangle 20"/>
+          <p:cNvSpPr/>
+          <p:nvPr/>
+        </p:nvSpPr>
+        <p:spPr>
+          <a:xfrm>
+            <a:off x="4287334" y="3345494"/>
+            <a:ext cx="532113" cy="137160"/>
+          </a:xfrm>
+          <a:prstGeom prst="roundRect">
+            <a:avLst>
+              <a:gd name="adj" fmla="val 50000"/>
+            </a:avLst>
+          </a:prstGeom>
           <a:solidFill>
-            <a:srgbClr val="2563EB"/>
+            <a:srgbClr val="D9F0FC"/>
           </a:solidFill>
           <a:ln>
             <a:noFill/>
           </a:ln>
-        </p:spPr>
-        <p:style>
-          <a:lnRef idx="1">
-            <a:schemeClr val="accent1"/>
-          </a:lnRef>
-          <a:fillRef idx="3">
-            <a:schemeClr val="accent1"/>
-          </a:fillRef>
-          <a:effectRef idx="2">
+          <a:effectLst>
+            <a:outerShdw blurRad="25000" dist="8000" dir="5400000" rotWithShape="0">
+              <a:srgbClr val="000000">
+                <a:alpha val="8000"/>
+              </a:srgbClr>
+            </a:outerShdw>
+          </a:effectLst>
+        </p:spPr>
+        <p:style>
+          <a:lnRef idx="1">
+            <a:schemeClr val="accent1"/>
+          </a:lnRef>
+          <a:fillRef idx="3">
+            <a:schemeClr val="accent1"/>
+          </a:fillRef>
+          <a:effectRef idx="0">
             <a:schemeClr val="accent1"/>
           </a:effectRef>
           <a:fontRef idx="minor">
@@ -9041,33 +8984,94 @@
       </p:sp>
       <p:sp>
         <p:nvSpPr>
-          <p:cNvPr id="24" name="Rectangle 23"/>
-          <p:cNvSpPr/>
-          <p:nvPr/>
-        </p:nvSpPr>
-        <p:spPr>
-          <a:xfrm>
-            <a:off x="2115142" y="5477055"/>
-            <a:ext cx="7958666" cy="8466"/>
+          <p:cNvPr id="22" name="TextBox 21"/>
+          <p:cNvSpPr txBox="1"/>
+          <p:nvPr/>
+        </p:nvSpPr>
+        <p:spPr>
+          <a:xfrm>
+            <a:off x="4287334" y="3345494"/>
+            <a:ext cx="1612418" cy="137160"/>
           </a:xfrm>
           <a:prstGeom prst="rect">
             <a:avLst/>
           </a:prstGeom>
+          <a:noFill/>
+        </p:spPr>
+        <p:txBody>
+          <a:bodyPr wrap="none" lIns="84666" rIns="84666" tIns="25400" bIns="25400">
+            <a:normAutofit/>
+          </a:bodyPr>
+          <a:lstStyle/>
+          <a:p>
+            <a:pPr>
+              <a:lnSpc>
+                <a:spcPct val="120000"/>
+              </a:lnSpc>
+            </a:pPr>
+            <a:r>
+              <a:rPr sz="919" b="0">
+                <a:solidFill>
+                  <a:srgbClr val="0C4A6E"/>
+                </a:solidFill>
+                <a:latin typeface="Microsoft YaHei"/>
+                <a:ea typeface="Microsoft YaHei"/>
+                <a:cs typeface="Microsoft YaHei"/>
+              </a:rPr>
+              <a:t xml:space="preserve">Blue Sky </a:t>
+            </a:r>
+            <a:r>
+              <a:rPr sz="919" b="1">
+                <a:solidFill>
+                  <a:srgbClr val="065F46"/>
+                </a:solidFill>
+                <a:latin typeface="Microsoft YaHei"/>
+                <a:ea typeface="Microsoft YaHei"/>
+                <a:cs typeface="Microsoft YaHei"/>
+              </a:rPr>
+              <a:t>当前</a:t>
+            </a:r>
+          </a:p>
+        </p:txBody>
+      </p:sp>
+      <p:sp>
+        <p:nvSpPr>
+          <p:cNvPr id="23" name="Rounded Rectangle 22"/>
+          <p:cNvSpPr/>
+          <p:nvPr/>
+        </p:nvSpPr>
+        <p:spPr>
+          <a:xfrm>
+            <a:off x="4287334" y="3528374"/>
+            <a:ext cx="818963" cy="221811"/>
+          </a:xfrm>
+          <a:prstGeom prst="roundRect">
+            <a:avLst>
+              <a:gd name="adj" fmla="val 45804"/>
+            </a:avLst>
+          </a:prstGeom>
           <a:solidFill>
-            <a:srgbClr val="2563EB"/>
+            <a:srgbClr val="D9F0FC"/>
           </a:solidFill>
           <a:ln>
             <a:noFill/>
           </a:ln>
-        </p:spPr>
-        <p:style>
-          <a:lnRef idx="1">
-            <a:schemeClr val="accent1"/>
-          </a:lnRef>
-          <a:fillRef idx="3">
-            <a:schemeClr val="accent1"/>
-          </a:fillRef>
-          <a:effectRef idx="2">
+          <a:effectLst>
+            <a:outerShdw blurRad="25000" dist="8000" dir="5400000" rotWithShape="0">
+              <a:srgbClr val="000000">
+                <a:alpha val="8000"/>
+              </a:srgbClr>
+            </a:outerShdw>
+          </a:effectLst>
+        </p:spPr>
+        <p:style>
+          <a:lnRef idx="1">
+            <a:schemeClr val="accent1"/>
+          </a:lnRef>
+          <a:fillRef idx="3">
+            <a:schemeClr val="accent1"/>
+          </a:fillRef>
+          <a:effectRef idx="0">
             <a:schemeClr val="accent1"/>
           </a:effectRef>
           <a:fontRef idx="minor">
@@ -9084,14 +9088,14 @@
       </p:sp>
       <p:sp>
         <p:nvSpPr>
-          <p:cNvPr id="25" name="TextBox 24"/>
+          <p:cNvPr id="24" name="TextBox 23"/>
           <p:cNvSpPr txBox="1"/>
           <p:nvPr/>
         </p:nvSpPr>
         <p:spPr>
           <a:xfrm>
-            <a:off x="2115142" y="5477055"/>
-            <a:ext cx="7958666" cy="587098"/>
+            <a:off x="4287334" y="3528374"/>
+            <a:ext cx="1612418" cy="221811"/>
           </a:xfrm>
           <a:prstGeom prst="rect">
             <a:avLst/>
@@ -9099,7 +9103,327 @@
           <a:noFill/>
         </p:spPr>
         <p:txBody>
-          <a:bodyPr wrap="none" lIns="118533" rIns="118533" tIns="76200" bIns="76200">
+          <a:bodyPr wrap="none" lIns="84666" rIns="84666" tIns="25400" bIns="25400">
+            <a:normAutofit/>
+          </a:bodyPr>
+          <a:lstStyle/>
+          <a:p>
+            <a:pPr>
+              <a:lnSpc>
+                <a:spcPct val="120000"/>
+              </a:lnSpc>
+            </a:pPr>
+            <a:r>
+              <a:rPr sz="919" b="0">
+                <a:solidFill>
+                  <a:srgbClr val="0C4A6E"/>
+                </a:solidFill>
+                <a:latin typeface="Microsoft YaHei"/>
+                <a:ea typeface="Microsoft YaHei"/>
+                <a:cs typeface="Microsoft YaHei"/>
+              </a:rPr>
+              <a:t>Notebook Tabs</a:t>
+            </a:r>
+          </a:p>
+        </p:txBody>
+      </p:sp>
+      <p:sp>
+        <p:nvSpPr>
+          <p:cNvPr id="25" name="Rounded Rectangle 24"/>
+          <p:cNvSpPr/>
+          <p:nvPr/>
+        </p:nvSpPr>
+        <p:spPr>
+          <a:xfrm>
+            <a:off x="4287334" y="3795906"/>
+            <a:ext cx="1620885" cy="137160"/>
+          </a:xfrm>
+          <a:prstGeom prst="roundRect">
+            <a:avLst>
+              <a:gd name="adj" fmla="val 50000"/>
+            </a:avLst>
+          </a:prstGeom>
+          <a:solidFill>
+            <a:srgbClr val="D9F0FC"/>
+          </a:solidFill>
+          <a:ln>
+            <a:noFill/>
+          </a:ln>
+          <a:effectLst>
+            <a:outerShdw blurRad="25000" dist="8000" dir="5400000" rotWithShape="0">
+              <a:srgbClr val="000000">
+                <a:alpha val="8000"/>
+              </a:srgbClr>
+            </a:outerShdw>
+          </a:effectLst>
+        </p:spPr>
+        <p:style>
+          <a:lnRef idx="1">
+            <a:schemeClr val="accent1"/>
+          </a:lnRef>
+          <a:fillRef idx="3">
+            <a:schemeClr val="accent1"/>
+          </a:fillRef>
+          <a:effectRef idx="0">
+            <a:schemeClr val="accent1"/>
+          </a:effectRef>
+          <a:fontRef idx="minor">
+            <a:schemeClr val="lt1"/>
+          </a:fontRef>
+        </p:style>
+        <p:txBody>
+          <a:bodyPr rtlCol="0" anchor="ctr"/>
+          <a:lstStyle/>
+          <a:p>
+            <a:pPr algn="ctr"/>
+          </a:p>
+        </p:txBody>
+      </p:sp>
+      <p:sp>
+        <p:nvSpPr>
+          <p:cNvPr id="26" name="TextBox 25"/>
+          <p:cNvSpPr txBox="1"/>
+          <p:nvPr/>
+        </p:nvSpPr>
+        <p:spPr>
+          <a:xfrm>
+            <a:off x="4287334" y="3795906"/>
+            <a:ext cx="1612418" cy="137160"/>
+          </a:xfrm>
+          <a:prstGeom prst="rect">
+            <a:avLst/>
+          </a:prstGeom>
+          <a:noFill/>
+        </p:spPr>
+        <p:txBody>
+          <a:bodyPr wrap="none" lIns="84666" rIns="84666" tIns="25400" bIns="25400">
+            <a:normAutofit/>
+          </a:bodyPr>
+          <a:lstStyle/>
+          <a:p>
+            <a:pPr>
+              <a:lnSpc>
+                <a:spcPct val="120000"/>
+              </a:lnSpc>
+            </a:pPr>
+            <a:r>
+              <a:rPr sz="919" b="0">
+                <a:solidFill>
+                  <a:srgbClr val="0C4A6E"/>
+                </a:solidFill>
+                <a:latin typeface="Microsoft YaHei"/>
+                <a:ea typeface="Microsoft YaHei"/>
+                <a:cs typeface="Microsoft YaHei"/>
+              </a:rPr>
+              <a:t>Pastel Geometry</a:t>
+            </a:r>
+          </a:p>
+        </p:txBody>
+      </p:sp>
+      <p:sp>
+        <p:nvSpPr>
+          <p:cNvPr id="27" name="Rounded Rectangle 26"/>
+          <p:cNvSpPr/>
+          <p:nvPr/>
+        </p:nvSpPr>
+        <p:spPr>
+          <a:xfrm>
+            <a:off x="4287334" y="3978786"/>
+            <a:ext cx="761593" cy="221811"/>
+          </a:xfrm>
+          <a:prstGeom prst="roundRect">
+            <a:avLst>
+              <a:gd name="adj" fmla="val 45804"/>
+            </a:avLst>
+          </a:prstGeom>
+          <a:solidFill>
+            <a:srgbClr val="D9F0FC"/>
+          </a:solidFill>
+          <a:ln>
+            <a:noFill/>
+          </a:ln>
+          <a:effectLst>
+            <a:outerShdw blurRad="25000" dist="8000" dir="5400000" rotWithShape="0">
+              <a:srgbClr val="000000">
+                <a:alpha val="8000"/>
+              </a:srgbClr>
+            </a:outerShdw>
+          </a:effectLst>
+        </p:spPr>
+        <p:style>
+          <a:lnRef idx="1">
+            <a:schemeClr val="accent1"/>
+          </a:lnRef>
+          <a:fillRef idx="3">
+            <a:schemeClr val="accent1"/>
+          </a:fillRef>
+          <a:effectRef idx="0">
+            <a:schemeClr val="accent1"/>
+          </a:effectRef>
+          <a:fontRef idx="minor">
+            <a:schemeClr val="lt1"/>
+          </a:fontRef>
+        </p:style>
+        <p:txBody>
+          <a:bodyPr rtlCol="0" anchor="ctr"/>
+          <a:lstStyle/>
+          <a:p>
+            <a:pPr algn="ctr"/>
+          </a:p>
+        </p:txBody>
+      </p:sp>
+      <p:sp>
+        <p:nvSpPr>
+          <p:cNvPr id="28" name="TextBox 27"/>
+          <p:cNvSpPr txBox="1"/>
+          <p:nvPr/>
+        </p:nvSpPr>
+        <p:spPr>
+          <a:xfrm>
+            <a:off x="4287334" y="3978786"/>
+            <a:ext cx="1612418" cy="221811"/>
+          </a:xfrm>
+          <a:prstGeom prst="rect">
+            <a:avLst/>
+          </a:prstGeom>
+          <a:noFill/>
+        </p:spPr>
+        <p:txBody>
+          <a:bodyPr wrap="none" lIns="84666" rIns="84666" tIns="25400" bIns="25400">
+            <a:normAutofit/>
+          </a:bodyPr>
+          <a:lstStyle/>
+          <a:p>
+            <a:pPr>
+              <a:lnSpc>
+                <a:spcPct val="120000"/>
+              </a:lnSpc>
+            </a:pPr>
+            <a:r>
+              <a:rPr sz="919" b="0">
+                <a:solidFill>
+                  <a:srgbClr val="0C4A6E"/>
+                </a:solidFill>
+                <a:latin typeface="Microsoft YaHei"/>
+                <a:ea typeface="Microsoft YaHei"/>
+                <a:cs typeface="Microsoft YaHei"/>
+              </a:rPr>
+              <a:t>Split Pastel</a:t>
+            </a:r>
+          </a:p>
+        </p:txBody>
+      </p:sp>
+      <p:sp>
+        <p:nvSpPr>
+          <p:cNvPr id="29" name="Rounded Rectangle 28"/>
+          <p:cNvSpPr/>
+          <p:nvPr/>
+        </p:nvSpPr>
+        <p:spPr>
+          <a:xfrm>
+            <a:off x="4287334" y="4246318"/>
+            <a:ext cx="1620885" cy="137160"/>
+          </a:xfrm>
+          <a:prstGeom prst="roundRect">
+            <a:avLst>
+              <a:gd name="adj" fmla="val 50000"/>
+            </a:avLst>
+          </a:prstGeom>
+          <a:solidFill>
+            <a:srgbClr val="D9F0FC"/>
+          </a:solidFill>
+          <a:ln>
+            <a:noFill/>
+          </a:ln>
+          <a:effectLst>
+            <a:outerShdw blurRad="25000" dist="8000" dir="5400000" rotWithShape="0">
+              <a:srgbClr val="000000">
+                <a:alpha val="8000"/>
+              </a:srgbClr>
+            </a:outerShdw>
+          </a:effectLst>
+        </p:spPr>
+        <p:style>
+          <a:lnRef idx="1">
+            <a:schemeClr val="accent1"/>
+          </a:lnRef>
+          <a:fillRef idx="3">
+            <a:schemeClr val="accent1"/>
+          </a:fillRef>
+          <a:effectRef idx="0">
+            <a:schemeClr val="accent1"/>
+          </a:effectRef>
+          <a:fontRef idx="minor">
+            <a:schemeClr val="lt1"/>
+          </a:fontRef>
+        </p:style>
+        <p:txBody>
+          <a:bodyPr rtlCol="0" anchor="ctr"/>
+          <a:lstStyle/>
+          <a:p>
+            <a:pPr algn="ctr"/>
+          </a:p>
+        </p:txBody>
+      </p:sp>
+      <p:sp>
+        <p:nvSpPr>
+          <p:cNvPr id="30" name="TextBox 29"/>
+          <p:cNvSpPr txBox="1"/>
+          <p:nvPr/>
+        </p:nvSpPr>
+        <p:spPr>
+          <a:xfrm>
+            <a:off x="4287334" y="4246318"/>
+            <a:ext cx="1612418" cy="137160"/>
+          </a:xfrm>
+          <a:prstGeom prst="rect">
+            <a:avLst/>
+          </a:prstGeom>
+          <a:noFill/>
+        </p:spPr>
+        <p:txBody>
+          <a:bodyPr wrap="none" lIns="84666" rIns="84666" tIns="25400" bIns="25400">
+            <a:normAutofit/>
+          </a:bodyPr>
+          <a:lstStyle/>
+          <a:p>
+            <a:pPr>
+              <a:lnSpc>
+                <a:spcPct val="120000"/>
+              </a:lnSpc>
+            </a:pPr>
+            <a:r>
+              <a:rPr sz="919" b="0">
+                <a:solidFill>
+                  <a:srgbClr val="0C4A6E"/>
+                </a:solidFill>
+                <a:latin typeface="Microsoft YaHei"/>
+                <a:ea typeface="Microsoft YaHei"/>
+                <a:cs typeface="Microsoft YaHei"/>
+              </a:rPr>
+              <a:t>Vintage Editorial</a:t>
+            </a:r>
+          </a:p>
+        </p:txBody>
+      </p:sp>
+      <p:sp>
+        <p:nvSpPr>
+          <p:cNvPr id="31" name="TextBox 30"/>
+          <p:cNvSpPr txBox="1"/>
+          <p:nvPr/>
+        </p:nvSpPr>
+        <p:spPr>
+          <a:xfrm>
+            <a:off x="4287334" y="4429198"/>
+            <a:ext cx="1612418" cy="156018"/>
+          </a:xfrm>
+          <a:prstGeom prst="rect">
+            <a:avLst/>
+          </a:prstGeom>
+          <a:noFill/>
+        </p:spPr>
+        <p:txBody>
+          <a:bodyPr wrap="none" lIns="0" rIns="0" tIns="0" bIns="0">
             <a:normAutofit/>
           </a:bodyPr>
           <a:lstStyle/>
@@ -9110,6 +9434,1656 @@
               </a:lnSpc>
             </a:pPr>
             <a:r>
+              <a:rPr sz="860" b="0">
+                <a:solidFill>
+                  <a:srgbClr val="64748B"/>
+                </a:solidFill>
+                <a:latin typeface="Microsoft YaHei"/>
+                <a:ea typeface="Microsoft YaHei"/>
+                <a:cs typeface="Microsoft YaHei"/>
+              </a:rPr>
+              <a:t>教育 · 内部 · 创意</a:t>
+            </a:r>
+          </a:p>
+        </p:txBody>
+      </p:sp>
+      <p:sp>
+        <p:nvSpPr>
+          <p:cNvPr id="32" name="Rounded Rectangle 31"/>
+          <p:cNvSpPr/>
+          <p:nvPr/>
+        </p:nvSpPr>
+        <p:spPr>
+          <a:xfrm>
+            <a:off x="6724661" y="3027148"/>
+            <a:ext cx="1925685" cy="1458147"/>
+          </a:xfrm>
+          <a:prstGeom prst="roundRect">
+            <a:avLst>
+              <a:gd name="adj" fmla="val 6967"/>
+            </a:avLst>
+          </a:prstGeom>
+          <a:solidFill>
+            <a:srgbClr val="FAFDFF"/>
+          </a:solidFill>
+          <a:ln>
+            <a:noFill/>
+          </a:ln>
+          <a:effectLst>
+            <a:outerShdw blurRad="25000" dist="8000" dir="5400000" rotWithShape="0">
+              <a:srgbClr val="000000">
+                <a:alpha val="8000"/>
+              </a:srgbClr>
+            </a:outerShdw>
+          </a:effectLst>
+        </p:spPr>
+        <p:style>
+          <a:lnRef idx="1">
+            <a:schemeClr val="accent1"/>
+          </a:lnRef>
+          <a:fillRef idx="3">
+            <a:schemeClr val="accent1"/>
+          </a:fillRef>
+          <a:effectRef idx="0">
+            <a:schemeClr val="accent1"/>
+          </a:effectRef>
+          <a:fontRef idx="minor">
+            <a:schemeClr val="lt1"/>
+          </a:fontRef>
+        </p:style>
+        <p:txBody>
+          <a:bodyPr rtlCol="0" anchor="ctr"/>
+          <a:lstStyle/>
+          <a:p>
+            <a:pPr algn="ctr"/>
+          </a:p>
+        </p:txBody>
+      </p:sp>
+      <p:sp>
+        <p:nvSpPr>
+          <p:cNvPr id="33" name="TextBox 32"/>
+          <p:cNvSpPr txBox="1"/>
+          <p:nvPr/>
+        </p:nvSpPr>
+        <p:spPr>
+          <a:xfrm>
+            <a:off x="6885528" y="3162614"/>
+            <a:ext cx="329861" cy="137160"/>
+          </a:xfrm>
+          <a:prstGeom prst="rect">
+            <a:avLst/>
+          </a:prstGeom>
+          <a:noFill/>
+        </p:spPr>
+        <p:txBody>
+          <a:bodyPr wrap="none" lIns="0" rIns="0" tIns="0" bIns="0">
+            <a:normAutofit/>
+          </a:bodyPr>
+          <a:lstStyle/>
+          <a:p>
+            <a:pPr>
+              <a:lnSpc>
+                <a:spcPct val="120000"/>
+              </a:lnSpc>
+            </a:pPr>
+            <a:r>
+              <a:rPr sz="1060" b="1">
+                <a:latin typeface="Microsoft YaHei"/>
+                <a:ea typeface="Microsoft YaHei"/>
+                <a:cs typeface="Microsoft YaHei"/>
+              </a:rPr>
+              <a:t>专业</a:t>
+            </a:r>
+          </a:p>
+        </p:txBody>
+      </p:sp>
+      <p:sp>
+        <p:nvSpPr>
+          <p:cNvPr id="34" name="TextBox 33"/>
+          <p:cNvSpPr txBox="1"/>
+          <p:nvPr/>
+        </p:nvSpPr>
+        <p:spPr>
+          <a:xfrm>
+            <a:off x="6673246" y="3162614"/>
+            <a:ext cx="290576" cy="137160"/>
+          </a:xfrm>
+          <a:prstGeom prst="rect">
+            <a:avLst/>
+          </a:prstGeom>
+          <a:noFill/>
+        </p:spPr>
+        <p:txBody>
+          <a:bodyPr wrap="none" lIns="0" rIns="0" tIns="0" bIns="0">
+            <a:normAutofit/>
+          </a:bodyPr>
+          <a:lstStyle/>
+          <a:p>
+            <a:pPr>
+              <a:lnSpc>
+                <a:spcPct val="120000"/>
+              </a:lnSpc>
+            </a:pPr>
+            <a:r>
+              <a:rPr sz="840" b="0">
+                <a:solidFill>
+                  <a:srgbClr val="64748B"/>
+                </a:solidFill>
+                <a:latin typeface="Microsoft YaHei"/>
+                <a:ea typeface="Microsoft YaHei"/>
+                <a:cs typeface="Microsoft YaHei"/>
+              </a:rPr>
+              <a:t>4 种</a:t>
+            </a:r>
+          </a:p>
+        </p:txBody>
+      </p:sp>
+      <p:sp>
+        <p:nvSpPr>
+          <p:cNvPr id="35" name="Rounded Rectangle 34"/>
+          <p:cNvSpPr/>
+          <p:nvPr/>
+        </p:nvSpPr>
+        <p:spPr>
+          <a:xfrm>
+            <a:off x="6885528" y="3345494"/>
+            <a:ext cx="646853" cy="137160"/>
+          </a:xfrm>
+          <a:prstGeom prst="roundRect">
+            <a:avLst>
+              <a:gd name="adj" fmla="val 50000"/>
+            </a:avLst>
+          </a:prstGeom>
+          <a:solidFill>
+            <a:srgbClr val="E5E9FE"/>
+          </a:solidFill>
+          <a:ln>
+            <a:noFill/>
+          </a:ln>
+          <a:effectLst>
+            <a:outerShdw blurRad="25000" dist="8000" dir="5400000" rotWithShape="0">
+              <a:srgbClr val="000000">
+                <a:alpha val="8000"/>
+              </a:srgbClr>
+            </a:outerShdw>
+          </a:effectLst>
+        </p:spPr>
+        <p:style>
+          <a:lnRef idx="1">
+            <a:schemeClr val="accent1"/>
+          </a:lnRef>
+          <a:fillRef idx="3">
+            <a:schemeClr val="accent1"/>
+          </a:fillRef>
+          <a:effectRef idx="0">
+            <a:schemeClr val="accent1"/>
+          </a:effectRef>
+          <a:fontRef idx="minor">
+            <a:schemeClr val="lt1"/>
+          </a:fontRef>
+        </p:style>
+        <p:txBody>
+          <a:bodyPr rtlCol="0" anchor="ctr"/>
+          <a:lstStyle/>
+          <a:p>
+            <a:pPr algn="ctr"/>
+          </a:p>
+        </p:txBody>
+      </p:sp>
+      <p:sp>
+        <p:nvSpPr>
+          <p:cNvPr id="36" name="TextBox 35"/>
+          <p:cNvSpPr txBox="1"/>
+          <p:nvPr/>
+        </p:nvSpPr>
+        <p:spPr>
+          <a:xfrm>
+            <a:off x="6885528" y="3345494"/>
+            <a:ext cx="1612418" cy="137160"/>
+          </a:xfrm>
+          <a:prstGeom prst="rect">
+            <a:avLst/>
+          </a:prstGeom>
+          <a:noFill/>
+        </p:spPr>
+        <p:txBody>
+          <a:bodyPr wrap="none" lIns="84666" rIns="84666" tIns="25400" bIns="25400">
+            <a:normAutofit/>
+          </a:bodyPr>
+          <a:lstStyle/>
+          <a:p>
+            <a:pPr>
+              <a:lnSpc>
+                <a:spcPct val="120000"/>
+              </a:lnSpc>
+            </a:pPr>
+            <a:r>
+              <a:rPr sz="919" b="0">
+                <a:solidFill>
+                  <a:srgbClr val="4C1D95"/>
+                </a:solidFill>
+                <a:latin typeface="Microsoft YaHei"/>
+                <a:ea typeface="Microsoft YaHei"/>
+                <a:cs typeface="Microsoft YaHei"/>
+              </a:rPr>
+              <a:t>Neon Cyber</a:t>
+            </a:r>
+          </a:p>
+        </p:txBody>
+      </p:sp>
+      <p:sp>
+        <p:nvSpPr>
+          <p:cNvPr id="37" name="Rounded Rectangle 36"/>
+          <p:cNvSpPr/>
+          <p:nvPr/>
+        </p:nvSpPr>
+        <p:spPr>
+          <a:xfrm>
+            <a:off x="6885528" y="3528374"/>
+            <a:ext cx="876333" cy="221811"/>
+          </a:xfrm>
+          <a:prstGeom prst="roundRect">
+            <a:avLst>
+              <a:gd name="adj" fmla="val 45804"/>
+            </a:avLst>
+          </a:prstGeom>
+          <a:solidFill>
+            <a:srgbClr val="E5E9FE"/>
+          </a:solidFill>
+          <a:ln>
+            <a:noFill/>
+          </a:ln>
+          <a:effectLst>
+            <a:outerShdw blurRad="25000" dist="8000" dir="5400000" rotWithShape="0">
+              <a:srgbClr val="000000">
+                <a:alpha val="8000"/>
+              </a:srgbClr>
+            </a:outerShdw>
+          </a:effectLst>
+        </p:spPr>
+        <p:style>
+          <a:lnRef idx="1">
+            <a:schemeClr val="accent1"/>
+          </a:lnRef>
+          <a:fillRef idx="3">
+            <a:schemeClr val="accent1"/>
+          </a:fillRef>
+          <a:effectRef idx="0">
+            <a:schemeClr val="accent1"/>
+          </a:effectRef>
+          <a:fontRef idx="minor">
+            <a:schemeClr val="lt1"/>
+          </a:fontRef>
+        </p:style>
+        <p:txBody>
+          <a:bodyPr rtlCol="0" anchor="ctr"/>
+          <a:lstStyle/>
+          <a:p>
+            <a:pPr algn="ctr"/>
+          </a:p>
+        </p:txBody>
+      </p:sp>
+      <p:sp>
+        <p:nvSpPr>
+          <p:cNvPr id="38" name="TextBox 37"/>
+          <p:cNvSpPr txBox="1"/>
+          <p:nvPr/>
+        </p:nvSpPr>
+        <p:spPr>
+          <a:xfrm>
+            <a:off x="6885528" y="3528374"/>
+            <a:ext cx="1612418" cy="221811"/>
+          </a:xfrm>
+          <a:prstGeom prst="rect">
+            <a:avLst/>
+          </a:prstGeom>
+          <a:noFill/>
+        </p:spPr>
+        <p:txBody>
+          <a:bodyPr wrap="none" lIns="84666" rIns="84666" tIns="25400" bIns="25400">
+            <a:normAutofit/>
+          </a:bodyPr>
+          <a:lstStyle/>
+          <a:p>
+            <a:pPr>
+              <a:lnSpc>
+                <a:spcPct val="120000"/>
+              </a:lnSpc>
+            </a:pPr>
+            <a:r>
+              <a:rPr sz="919" b="0">
+                <a:solidFill>
+                  <a:srgbClr val="4C1D95"/>
+                </a:solidFill>
+                <a:latin typeface="Microsoft YaHei"/>
+                <a:ea typeface="Microsoft YaHei"/>
+                <a:cs typeface="Microsoft YaHei"/>
+              </a:rPr>
+              <a:t>Terminal Green</a:t>
+            </a:r>
+          </a:p>
+        </p:txBody>
+      </p:sp>
+      <p:sp>
+        <p:nvSpPr>
+          <p:cNvPr id="39" name="Rounded Rectangle 38"/>
+          <p:cNvSpPr/>
+          <p:nvPr/>
+        </p:nvSpPr>
+        <p:spPr>
+          <a:xfrm>
+            <a:off x="6885528" y="3795906"/>
+            <a:ext cx="761593" cy="221811"/>
+          </a:xfrm>
+          <a:prstGeom prst="roundRect">
+            <a:avLst>
+              <a:gd name="adj" fmla="val 45804"/>
+            </a:avLst>
+          </a:prstGeom>
+          <a:solidFill>
+            <a:srgbClr val="E5E9FE"/>
+          </a:solidFill>
+          <a:ln>
+            <a:noFill/>
+          </a:ln>
+          <a:effectLst>
+            <a:outerShdw blurRad="25000" dist="8000" dir="5400000" rotWithShape="0">
+              <a:srgbClr val="000000">
+                <a:alpha val="8000"/>
+              </a:srgbClr>
+            </a:outerShdw>
+          </a:effectLst>
+        </p:spPr>
+        <p:style>
+          <a:lnRef idx="1">
+            <a:schemeClr val="accent1"/>
+          </a:lnRef>
+          <a:fillRef idx="3">
+            <a:schemeClr val="accent1"/>
+          </a:fillRef>
+          <a:effectRef idx="0">
+            <a:schemeClr val="accent1"/>
+          </a:effectRef>
+          <a:fontRef idx="minor">
+            <a:schemeClr val="lt1"/>
+          </a:fontRef>
+        </p:style>
+        <p:txBody>
+          <a:bodyPr rtlCol="0" anchor="ctr"/>
+          <a:lstStyle/>
+          <a:p>
+            <a:pPr algn="ctr"/>
+          </a:p>
+        </p:txBody>
+      </p:sp>
+      <p:sp>
+        <p:nvSpPr>
+          <p:cNvPr id="40" name="TextBox 39"/>
+          <p:cNvSpPr txBox="1"/>
+          <p:nvPr/>
+        </p:nvSpPr>
+        <p:spPr>
+          <a:xfrm>
+            <a:off x="6885528" y="3795906"/>
+            <a:ext cx="1612418" cy="221811"/>
+          </a:xfrm>
+          <a:prstGeom prst="rect">
+            <a:avLst/>
+          </a:prstGeom>
+          <a:noFill/>
+        </p:spPr>
+        <p:txBody>
+          <a:bodyPr wrap="none" lIns="84666" rIns="84666" tIns="25400" bIns="25400">
+            <a:normAutofit/>
+          </a:bodyPr>
+          <a:lstStyle/>
+          <a:p>
+            <a:pPr>
+              <a:lnSpc>
+                <a:spcPct val="120000"/>
+              </a:lnSpc>
+            </a:pPr>
+            <a:r>
+              <a:rPr sz="919" b="0">
+                <a:solidFill>
+                  <a:srgbClr val="4C1D95"/>
+                </a:solidFill>
+                <a:latin typeface="Microsoft YaHei"/>
+                <a:ea typeface="Microsoft YaHei"/>
+                <a:cs typeface="Microsoft YaHei"/>
+              </a:rPr>
+              <a:t>Swiss Modern</a:t>
+            </a:r>
+          </a:p>
+        </p:txBody>
+      </p:sp>
+      <p:sp>
+        <p:nvSpPr>
+          <p:cNvPr id="41" name="Rounded Rectangle 40"/>
+          <p:cNvSpPr/>
+          <p:nvPr/>
+        </p:nvSpPr>
+        <p:spPr>
+          <a:xfrm>
+            <a:off x="6297665" y="4063438"/>
+            <a:ext cx="704223" cy="221811"/>
+          </a:xfrm>
+          <a:prstGeom prst="roundRect">
+            <a:avLst>
+              <a:gd name="adj" fmla="val 45804"/>
+            </a:avLst>
+          </a:prstGeom>
+          <a:solidFill>
+            <a:srgbClr val="E5E9FE"/>
+          </a:solidFill>
+          <a:ln>
+            <a:noFill/>
+          </a:ln>
+          <a:effectLst>
+            <a:outerShdw blurRad="25000" dist="8000" dir="5400000" rotWithShape="0">
+              <a:srgbClr val="000000">
+                <a:alpha val="8000"/>
+              </a:srgbClr>
+            </a:outerShdw>
+          </a:effectLst>
+        </p:spPr>
+        <p:style>
+          <a:lnRef idx="1">
+            <a:schemeClr val="accent1"/>
+          </a:lnRef>
+          <a:fillRef idx="3">
+            <a:schemeClr val="accent1"/>
+          </a:fillRef>
+          <a:effectRef idx="0">
+            <a:schemeClr val="accent1"/>
+          </a:effectRef>
+          <a:fontRef idx="minor">
+            <a:schemeClr val="lt1"/>
+          </a:fontRef>
+        </p:style>
+        <p:txBody>
+          <a:bodyPr rtlCol="0" anchor="ctr"/>
+          <a:lstStyle/>
+          <a:p>
+            <a:pPr algn="ctr"/>
+          </a:p>
+        </p:txBody>
+      </p:sp>
+      <p:sp>
+        <p:nvSpPr>
+          <p:cNvPr id="42" name="TextBox 41"/>
+          <p:cNvSpPr txBox="1"/>
+          <p:nvPr/>
+        </p:nvSpPr>
+        <p:spPr>
+          <a:xfrm>
+            <a:off x="6297665" y="4063438"/>
+            <a:ext cx="1612418" cy="221811"/>
+          </a:xfrm>
+          <a:prstGeom prst="rect">
+            <a:avLst/>
+          </a:prstGeom>
+          <a:noFill/>
+        </p:spPr>
+        <p:txBody>
+          <a:bodyPr wrap="none" lIns="84666" rIns="84666" tIns="25400" bIns="25400">
+            <a:normAutofit/>
+          </a:bodyPr>
+          <a:lstStyle/>
+          <a:p>
+            <a:pPr>
+              <a:lnSpc>
+                <a:spcPct val="120000"/>
+              </a:lnSpc>
+            </a:pPr>
+            <a:r>
+              <a:rPr sz="919" b="0">
+                <a:solidFill>
+                  <a:srgbClr val="4C1D95"/>
+                </a:solidFill>
+                <a:latin typeface="Microsoft YaHei"/>
+                <a:ea typeface="Microsoft YaHei"/>
+                <a:cs typeface="Microsoft YaHei"/>
+              </a:rPr>
+              <a:t>Paper &amp; Ink</a:t>
+            </a:r>
+          </a:p>
+        </p:txBody>
+      </p:sp>
+      <p:sp>
+        <p:nvSpPr>
+          <p:cNvPr id="43" name="TextBox 42"/>
+          <p:cNvSpPr txBox="1"/>
+          <p:nvPr/>
+        </p:nvSpPr>
+        <p:spPr>
+          <a:xfrm>
+            <a:off x="6297665" y="4330970"/>
+            <a:ext cx="1612418" cy="156018"/>
+          </a:xfrm>
+          <a:prstGeom prst="rect">
+            <a:avLst/>
+          </a:prstGeom>
+          <a:noFill/>
+        </p:spPr>
+        <p:txBody>
+          <a:bodyPr wrap="none" lIns="0" rIns="0" tIns="0" bIns="0">
+            <a:normAutofit/>
+          </a:bodyPr>
+          <a:lstStyle/>
+          <a:p>
+            <a:pPr>
+              <a:lnSpc>
+                <a:spcPct val="160000"/>
+              </a:lnSpc>
+            </a:pPr>
+            <a:r>
+              <a:rPr sz="860" b="0">
+                <a:solidFill>
+                  <a:srgbClr val="64748B"/>
+                </a:solidFill>
+                <a:latin typeface="Microsoft YaHei"/>
+                <a:ea typeface="Microsoft YaHei"/>
+                <a:cs typeface="Microsoft YaHei"/>
+              </a:rPr>
+              <a:t>开发 · 学术 · 极简</a:t>
+            </a:r>
+          </a:p>
+        </p:txBody>
+      </p:sp>
+      <p:sp>
+        <p:nvSpPr>
+          <p:cNvPr id="44" name="Rounded Rectangle 43"/>
+          <p:cNvSpPr/>
+          <p:nvPr/>
+        </p:nvSpPr>
+        <p:spPr>
+          <a:xfrm>
+            <a:off x="8147129" y="3027148"/>
+            <a:ext cx="1925685" cy="2157232"/>
+          </a:xfrm>
+          <a:prstGeom prst="roundRect">
+            <a:avLst>
+              <a:gd name="adj" fmla="val 5276"/>
+            </a:avLst>
+          </a:prstGeom>
+          <a:solidFill>
+            <a:srgbClr val="FAFDFF"/>
+          </a:solidFill>
+          <a:ln>
+            <a:noFill/>
+          </a:ln>
+          <a:effectLst>
+            <a:outerShdw blurRad="25000" dist="8000" dir="5400000" rotWithShape="0">
+              <a:srgbClr val="000000">
+                <a:alpha val="8000"/>
+              </a:srgbClr>
+            </a:outerShdw>
+          </a:effectLst>
+        </p:spPr>
+        <p:style>
+          <a:lnRef idx="1">
+            <a:schemeClr val="accent1"/>
+          </a:lnRef>
+          <a:fillRef idx="3">
+            <a:schemeClr val="accent1"/>
+          </a:fillRef>
+          <a:effectRef idx="0">
+            <a:schemeClr val="accent1"/>
+          </a:effectRef>
+          <a:fontRef idx="minor">
+            <a:schemeClr val="lt1"/>
+          </a:fontRef>
+        </p:style>
+        <p:txBody>
+          <a:bodyPr rtlCol="0" anchor="ctr"/>
+          <a:lstStyle/>
+          <a:p>
+            <a:pPr algn="ctr"/>
+          </a:p>
+        </p:txBody>
+      </p:sp>
+      <p:sp>
+        <p:nvSpPr>
+          <p:cNvPr id="45" name="TextBox 44"/>
+          <p:cNvSpPr txBox="1"/>
+          <p:nvPr/>
+        </p:nvSpPr>
+        <p:spPr>
+          <a:xfrm>
+            <a:off x="8307996" y="3162614"/>
+            <a:ext cx="495015" cy="195456"/>
+          </a:xfrm>
+          <a:prstGeom prst="rect">
+            <a:avLst/>
+          </a:prstGeom>
+          <a:noFill/>
+        </p:spPr>
+        <p:txBody>
+          <a:bodyPr wrap="none" lIns="0" rIns="0" tIns="0" bIns="0">
+            <a:normAutofit/>
+          </a:bodyPr>
+          <a:lstStyle/>
+          <a:p>
+            <a:pPr>
+              <a:lnSpc>
+                <a:spcPct val="120000"/>
+              </a:lnSpc>
+            </a:pPr>
+            <a:r>
+              <a:rPr sz="1060" b="1">
+                <a:latin typeface="Microsoft YaHei"/>
+                <a:ea typeface="Microsoft YaHei"/>
+                <a:cs typeface="Microsoft YaHei"/>
+              </a:rPr>
+              <a:t>v1.5 新增</a:t>
+            </a:r>
+          </a:p>
+        </p:txBody>
+      </p:sp>
+      <p:sp>
+        <p:nvSpPr>
+          <p:cNvPr id="46" name="TextBox 45"/>
+          <p:cNvSpPr txBox="1"/>
+          <p:nvPr/>
+        </p:nvSpPr>
+        <p:spPr>
+          <a:xfrm>
+            <a:off x="8848731" y="3162614"/>
+            <a:ext cx="290576" cy="137160"/>
+          </a:xfrm>
+          <a:prstGeom prst="rect">
+            <a:avLst/>
+          </a:prstGeom>
+          <a:noFill/>
+        </p:spPr>
+        <p:txBody>
+          <a:bodyPr wrap="none" lIns="0" rIns="0" tIns="0" bIns="0">
+            <a:normAutofit/>
+          </a:bodyPr>
+          <a:lstStyle/>
+          <a:p>
+            <a:pPr>
+              <a:lnSpc>
+                <a:spcPct val="120000"/>
+              </a:lnSpc>
+            </a:pPr>
+            <a:r>
+              <a:rPr sz="840" b="0">
+                <a:solidFill>
+                  <a:srgbClr val="64748B"/>
+                </a:solidFill>
+                <a:latin typeface="Microsoft YaHei"/>
+                <a:ea typeface="Microsoft YaHei"/>
+                <a:cs typeface="Microsoft YaHei"/>
+              </a:rPr>
+              <a:t>8 种</a:t>
+            </a:r>
+          </a:p>
+        </p:txBody>
+      </p:sp>
+      <p:sp>
+        <p:nvSpPr>
+          <p:cNvPr id="47" name="Rounded Rectangle 46"/>
+          <p:cNvSpPr/>
+          <p:nvPr/>
+        </p:nvSpPr>
+        <p:spPr>
+          <a:xfrm>
+            <a:off x="8307996" y="3403791"/>
+            <a:ext cx="704223" cy="221811"/>
+          </a:xfrm>
+          <a:prstGeom prst="roundRect">
+            <a:avLst>
+              <a:gd name="adj" fmla="val 45804"/>
+            </a:avLst>
+          </a:prstGeom>
+          <a:solidFill>
+            <a:srgbClr val="DFEDFD"/>
+          </a:solidFill>
+          <a:ln>
+            <a:noFill/>
+          </a:ln>
+          <a:effectLst>
+            <a:outerShdw blurRad="25000" dist="8000" dir="5400000" rotWithShape="0">
+              <a:srgbClr val="000000">
+                <a:alpha val="8000"/>
+              </a:srgbClr>
+            </a:outerShdw>
+          </a:effectLst>
+        </p:spPr>
+        <p:style>
+          <a:lnRef idx="1">
+            <a:schemeClr val="accent1"/>
+          </a:lnRef>
+          <a:fillRef idx="3">
+            <a:schemeClr val="accent1"/>
+          </a:fillRef>
+          <a:effectRef idx="0">
+            <a:schemeClr val="accent1"/>
+          </a:effectRef>
+          <a:fontRef idx="minor">
+            <a:schemeClr val="lt1"/>
+          </a:fontRef>
+        </p:style>
+        <p:txBody>
+          <a:bodyPr rtlCol="0" anchor="ctr"/>
+          <a:lstStyle/>
+          <a:p>
+            <a:pPr algn="ctr"/>
+          </a:p>
+        </p:txBody>
+      </p:sp>
+      <p:sp>
+        <p:nvSpPr>
+          <p:cNvPr id="48" name="TextBox 47"/>
+          <p:cNvSpPr txBox="1"/>
+          <p:nvPr/>
+        </p:nvSpPr>
+        <p:spPr>
+          <a:xfrm>
+            <a:off x="8307996" y="3403791"/>
+            <a:ext cx="1612418" cy="221811"/>
+          </a:xfrm>
+          <a:prstGeom prst="rect">
+            <a:avLst/>
+          </a:prstGeom>
+          <a:noFill/>
+        </p:spPr>
+        <p:txBody>
+          <a:bodyPr wrap="none" lIns="84666" rIns="84666" tIns="25400" bIns="25400">
+            <a:normAutofit/>
+          </a:bodyPr>
+          <a:lstStyle/>
+          <a:p>
+            <a:pPr>
+              <a:lnSpc>
+                <a:spcPct val="120000"/>
+              </a:lnSpc>
+            </a:pPr>
+            <a:r>
+              <a:rPr sz="919" b="0">
+                <a:solidFill>
+                  <a:srgbClr val="1E3A8A"/>
+                </a:solidFill>
+                <a:latin typeface="Microsoft YaHei"/>
+                <a:ea typeface="Microsoft YaHei"/>
+                <a:cs typeface="Microsoft YaHei"/>
+              </a:rPr>
+              <a:t>Aurora Mesh</a:t>
+            </a:r>
+          </a:p>
+        </p:txBody>
+      </p:sp>
+      <p:sp>
+        <p:nvSpPr>
+          <p:cNvPr id="49" name="Rounded Rectangle 48"/>
+          <p:cNvSpPr/>
+          <p:nvPr/>
+        </p:nvSpPr>
+        <p:spPr>
+          <a:xfrm>
+            <a:off x="8307996" y="3671323"/>
+            <a:ext cx="1620885" cy="137160"/>
+          </a:xfrm>
+          <a:prstGeom prst="roundRect">
+            <a:avLst>
+              <a:gd name="adj" fmla="val 50000"/>
+            </a:avLst>
+          </a:prstGeom>
+          <a:solidFill>
+            <a:srgbClr val="DFEDFD"/>
+          </a:solidFill>
+          <a:ln>
+            <a:noFill/>
+          </a:ln>
+          <a:effectLst>
+            <a:outerShdw blurRad="25000" dist="8000" dir="5400000" rotWithShape="0">
+              <a:srgbClr val="000000">
+                <a:alpha val="8000"/>
+              </a:srgbClr>
+            </a:outerShdw>
+          </a:effectLst>
+        </p:spPr>
+        <p:style>
+          <a:lnRef idx="1">
+            <a:schemeClr val="accent1"/>
+          </a:lnRef>
+          <a:fillRef idx="3">
+            <a:schemeClr val="accent1"/>
+          </a:fillRef>
+          <a:effectRef idx="0">
+            <a:schemeClr val="accent1"/>
+          </a:effectRef>
+          <a:fontRef idx="minor">
+            <a:schemeClr val="lt1"/>
+          </a:fontRef>
+        </p:style>
+        <p:txBody>
+          <a:bodyPr rtlCol="0" anchor="ctr"/>
+          <a:lstStyle/>
+          <a:p>
+            <a:pPr algn="ctr"/>
+          </a:p>
+        </p:txBody>
+      </p:sp>
+      <p:sp>
+        <p:nvSpPr>
+          <p:cNvPr id="50" name="TextBox 49"/>
+          <p:cNvSpPr txBox="1"/>
+          <p:nvPr/>
+        </p:nvSpPr>
+        <p:spPr>
+          <a:xfrm>
+            <a:off x="8307996" y="3671323"/>
+            <a:ext cx="1612418" cy="137160"/>
+          </a:xfrm>
+          <a:prstGeom prst="rect">
+            <a:avLst/>
+          </a:prstGeom>
+          <a:noFill/>
+        </p:spPr>
+        <p:txBody>
+          <a:bodyPr wrap="none" lIns="84666" rIns="84666" tIns="25400" bIns="25400">
+            <a:normAutofit/>
+          </a:bodyPr>
+          <a:lstStyle/>
+          <a:p>
+            <a:pPr>
+              <a:lnSpc>
+                <a:spcPct val="120000"/>
+              </a:lnSpc>
+            </a:pPr>
+            <a:r>
+              <a:rPr sz="919" b="0">
+                <a:solidFill>
+                  <a:srgbClr val="1E3A8A"/>
+                </a:solidFill>
+                <a:latin typeface="Microsoft YaHei"/>
+                <a:ea typeface="Microsoft YaHei"/>
+                <a:cs typeface="Microsoft YaHei"/>
+              </a:rPr>
+              <a:t>Enterprise Dark</a:t>
+            </a:r>
+          </a:p>
+        </p:txBody>
+      </p:sp>
+      <p:sp>
+        <p:nvSpPr>
+          <p:cNvPr id="51" name="Rounded Rectangle 50"/>
+          <p:cNvSpPr/>
+          <p:nvPr/>
+        </p:nvSpPr>
+        <p:spPr>
+          <a:xfrm>
+            <a:off x="8307996" y="3854203"/>
+            <a:ext cx="818963" cy="221811"/>
+          </a:xfrm>
+          <a:prstGeom prst="roundRect">
+            <a:avLst>
+              <a:gd name="adj" fmla="val 45804"/>
+            </a:avLst>
+          </a:prstGeom>
+          <a:solidFill>
+            <a:srgbClr val="DFEDFD"/>
+          </a:solidFill>
+          <a:ln>
+            <a:noFill/>
+          </a:ln>
+          <a:effectLst>
+            <a:outerShdw blurRad="25000" dist="8000" dir="5400000" rotWithShape="0">
+              <a:srgbClr val="000000">
+                <a:alpha val="8000"/>
+              </a:srgbClr>
+            </a:outerShdw>
+          </a:effectLst>
+        </p:spPr>
+        <p:style>
+          <a:lnRef idx="1">
+            <a:schemeClr val="accent1"/>
+          </a:lnRef>
+          <a:fillRef idx="3">
+            <a:schemeClr val="accent1"/>
+          </a:fillRef>
+          <a:effectRef idx="0">
+            <a:schemeClr val="accent1"/>
+          </a:effectRef>
+          <a:fontRef idx="minor">
+            <a:schemeClr val="lt1"/>
+          </a:fontRef>
+        </p:style>
+        <p:txBody>
+          <a:bodyPr rtlCol="0" anchor="ctr"/>
+          <a:lstStyle/>
+          <a:p>
+            <a:pPr algn="ctr"/>
+          </a:p>
+        </p:txBody>
+      </p:sp>
+      <p:sp>
+        <p:nvSpPr>
+          <p:cNvPr id="52" name="TextBox 51"/>
+          <p:cNvSpPr txBox="1"/>
+          <p:nvPr/>
+        </p:nvSpPr>
+        <p:spPr>
+          <a:xfrm>
+            <a:off x="8307996" y="3854203"/>
+            <a:ext cx="1612418" cy="221811"/>
+          </a:xfrm>
+          <a:prstGeom prst="rect">
+            <a:avLst/>
+          </a:prstGeom>
+          <a:noFill/>
+        </p:spPr>
+        <p:txBody>
+          <a:bodyPr wrap="none" lIns="84666" rIns="84666" tIns="25400" bIns="25400">
+            <a:normAutofit/>
+          </a:bodyPr>
+          <a:lstStyle/>
+          <a:p>
+            <a:pPr>
+              <a:lnSpc>
+                <a:spcPct val="120000"/>
+              </a:lnSpc>
+            </a:pPr>
+            <a:r>
+              <a:rPr sz="919" b="0">
+                <a:solidFill>
+                  <a:srgbClr val="1E3A8A"/>
+                </a:solidFill>
+                <a:latin typeface="Microsoft YaHei"/>
+                <a:ea typeface="Microsoft YaHei"/>
+                <a:cs typeface="Microsoft YaHei"/>
+              </a:rPr>
+              <a:t>Glassmorphism</a:t>
+            </a:r>
+          </a:p>
+        </p:txBody>
+      </p:sp>
+      <p:sp>
+        <p:nvSpPr>
+          <p:cNvPr id="53" name="Rounded Rectangle 52"/>
+          <p:cNvSpPr/>
+          <p:nvPr/>
+        </p:nvSpPr>
+        <p:spPr>
+          <a:xfrm>
+            <a:off x="8307996" y="4121735"/>
+            <a:ext cx="818963" cy="221811"/>
+          </a:xfrm>
+          <a:prstGeom prst="roundRect">
+            <a:avLst>
+              <a:gd name="adj" fmla="val 45804"/>
+            </a:avLst>
+          </a:prstGeom>
+          <a:solidFill>
+            <a:srgbClr val="DFEDFD"/>
+          </a:solidFill>
+          <a:ln>
+            <a:noFill/>
+          </a:ln>
+          <a:effectLst>
+            <a:outerShdw blurRad="25000" dist="8000" dir="5400000" rotWithShape="0">
+              <a:srgbClr val="000000">
+                <a:alpha val="8000"/>
+              </a:srgbClr>
+            </a:outerShdw>
+          </a:effectLst>
+        </p:spPr>
+        <p:style>
+          <a:lnRef idx="1">
+            <a:schemeClr val="accent1"/>
+          </a:lnRef>
+          <a:fillRef idx="3">
+            <a:schemeClr val="accent1"/>
+          </a:fillRef>
+          <a:effectRef idx="0">
+            <a:schemeClr val="accent1"/>
+          </a:effectRef>
+          <a:fontRef idx="minor">
+            <a:schemeClr val="lt1"/>
+          </a:fontRef>
+        </p:style>
+        <p:txBody>
+          <a:bodyPr rtlCol="0" anchor="ctr"/>
+          <a:lstStyle/>
+          <a:p>
+            <a:pPr algn="ctr"/>
+          </a:p>
+        </p:txBody>
+      </p:sp>
+      <p:sp>
+        <p:nvSpPr>
+          <p:cNvPr id="54" name="TextBox 53"/>
+          <p:cNvSpPr txBox="1"/>
+          <p:nvPr/>
+        </p:nvSpPr>
+        <p:spPr>
+          <a:xfrm>
+            <a:off x="8307996" y="4121735"/>
+            <a:ext cx="1612418" cy="221811"/>
+          </a:xfrm>
+          <a:prstGeom prst="rect">
+            <a:avLst/>
+          </a:prstGeom>
+          <a:noFill/>
+        </p:spPr>
+        <p:txBody>
+          <a:bodyPr wrap="none" lIns="84666" rIns="84666" tIns="25400" bIns="25400">
+            <a:normAutofit/>
+          </a:bodyPr>
+          <a:lstStyle/>
+          <a:p>
+            <a:pPr>
+              <a:lnSpc>
+                <a:spcPct val="120000"/>
+              </a:lnSpc>
+            </a:pPr>
+            <a:r>
+              <a:rPr sz="919" b="0">
+                <a:solidFill>
+                  <a:srgbClr val="1E3A8A"/>
+                </a:solidFill>
+                <a:latin typeface="Microsoft YaHei"/>
+                <a:ea typeface="Microsoft YaHei"/>
+                <a:cs typeface="Microsoft YaHei"/>
+              </a:rPr>
+              <a:t>Neo-Brutalism</a:t>
+            </a:r>
+          </a:p>
+        </p:txBody>
+      </p:sp>
+      <p:sp>
+        <p:nvSpPr>
+          <p:cNvPr id="55" name="Rounded Rectangle 54"/>
+          <p:cNvSpPr/>
+          <p:nvPr/>
+        </p:nvSpPr>
+        <p:spPr>
+          <a:xfrm>
+            <a:off x="8307996" y="4389266"/>
+            <a:ext cx="761593" cy="221811"/>
+          </a:xfrm>
+          <a:prstGeom prst="roundRect">
+            <a:avLst>
+              <a:gd name="adj" fmla="val 45804"/>
+            </a:avLst>
+          </a:prstGeom>
+          <a:solidFill>
+            <a:srgbClr val="DFEDFD"/>
+          </a:solidFill>
+          <a:ln>
+            <a:noFill/>
+          </a:ln>
+          <a:effectLst>
+            <a:outerShdw blurRad="25000" dist="8000" dir="5400000" rotWithShape="0">
+              <a:srgbClr val="000000">
+                <a:alpha val="8000"/>
+              </a:srgbClr>
+            </a:outerShdw>
+          </a:effectLst>
+        </p:spPr>
+        <p:style>
+          <a:lnRef idx="1">
+            <a:schemeClr val="accent1"/>
+          </a:lnRef>
+          <a:fillRef idx="3">
+            <a:schemeClr val="accent1"/>
+          </a:fillRef>
+          <a:effectRef idx="0">
+            <a:schemeClr val="accent1"/>
+          </a:effectRef>
+          <a:fontRef idx="minor">
+            <a:schemeClr val="lt1"/>
+          </a:fontRef>
+        </p:style>
+        <p:txBody>
+          <a:bodyPr rtlCol="0" anchor="ctr"/>
+          <a:lstStyle/>
+          <a:p>
+            <a:pPr algn="ctr"/>
+          </a:p>
+        </p:txBody>
+      </p:sp>
+      <p:sp>
+        <p:nvSpPr>
+          <p:cNvPr id="56" name="TextBox 55"/>
+          <p:cNvSpPr txBox="1"/>
+          <p:nvPr/>
+        </p:nvSpPr>
+        <p:spPr>
+          <a:xfrm>
+            <a:off x="8307996" y="4389266"/>
+            <a:ext cx="1612418" cy="221811"/>
+          </a:xfrm>
+          <a:prstGeom prst="rect">
+            <a:avLst/>
+          </a:prstGeom>
+          <a:noFill/>
+        </p:spPr>
+        <p:txBody>
+          <a:bodyPr wrap="none" lIns="84666" rIns="84666" tIns="25400" bIns="25400">
+            <a:normAutofit/>
+          </a:bodyPr>
+          <a:lstStyle/>
+          <a:p>
+            <a:pPr>
+              <a:lnSpc>
+                <a:spcPct val="120000"/>
+              </a:lnSpc>
+            </a:pPr>
+            <a:r>
+              <a:rPr sz="919" b="0">
+                <a:solidFill>
+                  <a:srgbClr val="1E3A8A"/>
+                </a:solidFill>
+                <a:latin typeface="Microsoft YaHei"/>
+                <a:ea typeface="Microsoft YaHei"/>
+                <a:cs typeface="Microsoft YaHei"/>
+              </a:rPr>
+              <a:t>Chinese Chan</a:t>
+            </a:r>
+          </a:p>
+        </p:txBody>
+      </p:sp>
+      <p:sp>
+        <p:nvSpPr>
+          <p:cNvPr id="57" name="Rounded Rectangle 56"/>
+          <p:cNvSpPr/>
+          <p:nvPr/>
+        </p:nvSpPr>
+        <p:spPr>
+          <a:xfrm>
+            <a:off x="8307996" y="4656798"/>
+            <a:ext cx="646853" cy="137160"/>
+          </a:xfrm>
+          <a:prstGeom prst="roundRect">
+            <a:avLst>
+              <a:gd name="adj" fmla="val 50000"/>
+            </a:avLst>
+          </a:prstGeom>
+          <a:solidFill>
+            <a:srgbClr val="DFEDFD"/>
+          </a:solidFill>
+          <a:ln>
+            <a:noFill/>
+          </a:ln>
+          <a:effectLst>
+            <a:outerShdw blurRad="25000" dist="8000" dir="5400000" rotWithShape="0">
+              <a:srgbClr val="000000">
+                <a:alpha val="8000"/>
+              </a:srgbClr>
+            </a:outerShdw>
+          </a:effectLst>
+        </p:spPr>
+        <p:style>
+          <a:lnRef idx="1">
+            <a:schemeClr val="accent1"/>
+          </a:lnRef>
+          <a:fillRef idx="3">
+            <a:schemeClr val="accent1"/>
+          </a:fillRef>
+          <a:effectRef idx="0">
+            <a:schemeClr val="accent1"/>
+          </a:effectRef>
+          <a:fontRef idx="minor">
+            <a:schemeClr val="lt1"/>
+          </a:fontRef>
+        </p:style>
+        <p:txBody>
+          <a:bodyPr rtlCol="0" anchor="ctr"/>
+          <a:lstStyle/>
+          <a:p>
+            <a:pPr algn="ctr"/>
+          </a:p>
+        </p:txBody>
+      </p:sp>
+      <p:sp>
+        <p:nvSpPr>
+          <p:cNvPr id="58" name="TextBox 57"/>
+          <p:cNvSpPr txBox="1"/>
+          <p:nvPr/>
+        </p:nvSpPr>
+        <p:spPr>
+          <a:xfrm>
+            <a:off x="8307996" y="4656798"/>
+            <a:ext cx="1612418" cy="137160"/>
+          </a:xfrm>
+          <a:prstGeom prst="rect">
+            <a:avLst/>
+          </a:prstGeom>
+          <a:noFill/>
+        </p:spPr>
+        <p:txBody>
+          <a:bodyPr wrap="none" lIns="84666" rIns="84666" tIns="25400" bIns="25400">
+            <a:normAutofit/>
+          </a:bodyPr>
+          <a:lstStyle/>
+          <a:p>
+            <a:pPr>
+              <a:lnSpc>
+                <a:spcPct val="120000"/>
+              </a:lnSpc>
+            </a:pPr>
+            <a:r>
+              <a:rPr sz="919" b="0">
+                <a:solidFill>
+                  <a:srgbClr val="1E3A8A"/>
+                </a:solidFill>
+                <a:latin typeface="Microsoft YaHei"/>
+                <a:ea typeface="Microsoft YaHei"/>
+                <a:cs typeface="Microsoft YaHei"/>
+              </a:rPr>
+              <a:t>Data Story</a:t>
+            </a:r>
+          </a:p>
+        </p:txBody>
+      </p:sp>
+      <p:sp>
+        <p:nvSpPr>
+          <p:cNvPr id="59" name="Rounded Rectangle 58"/>
+          <p:cNvSpPr/>
+          <p:nvPr/>
+        </p:nvSpPr>
+        <p:spPr>
+          <a:xfrm>
+            <a:off x="8307996" y="4839678"/>
+            <a:ext cx="1620885" cy="137160"/>
+          </a:xfrm>
+          <a:prstGeom prst="roundRect">
+            <a:avLst>
+              <a:gd name="adj" fmla="val 50000"/>
+            </a:avLst>
+          </a:prstGeom>
+          <a:solidFill>
+            <a:srgbClr val="DFEDFD"/>
+          </a:solidFill>
+          <a:ln>
+            <a:noFill/>
+          </a:ln>
+          <a:effectLst>
+            <a:outerShdw blurRad="25000" dist="8000" dir="5400000" rotWithShape="0">
+              <a:srgbClr val="000000">
+                <a:alpha val="8000"/>
+              </a:srgbClr>
+            </a:outerShdw>
+          </a:effectLst>
+        </p:spPr>
+        <p:style>
+          <a:lnRef idx="1">
+            <a:schemeClr val="accent1"/>
+          </a:lnRef>
+          <a:fillRef idx="3">
+            <a:schemeClr val="accent1"/>
+          </a:fillRef>
+          <a:effectRef idx="0">
+            <a:schemeClr val="accent1"/>
+          </a:effectRef>
+          <a:fontRef idx="minor">
+            <a:schemeClr val="lt1"/>
+          </a:fontRef>
+        </p:style>
+        <p:txBody>
+          <a:bodyPr rtlCol="0" anchor="ctr"/>
+          <a:lstStyle/>
+          <a:p>
+            <a:pPr algn="ctr"/>
+          </a:p>
+        </p:txBody>
+      </p:sp>
+      <p:sp>
+        <p:nvSpPr>
+          <p:cNvPr id="60" name="TextBox 59"/>
+          <p:cNvSpPr txBox="1"/>
+          <p:nvPr/>
+        </p:nvSpPr>
+        <p:spPr>
+          <a:xfrm>
+            <a:off x="8307996" y="4839678"/>
+            <a:ext cx="1612418" cy="137160"/>
+          </a:xfrm>
+          <a:prstGeom prst="rect">
+            <a:avLst/>
+          </a:prstGeom>
+          <a:noFill/>
+        </p:spPr>
+        <p:txBody>
+          <a:bodyPr wrap="none" lIns="84666" rIns="84666" tIns="25400" bIns="25400">
+            <a:normAutofit/>
+          </a:bodyPr>
+          <a:lstStyle/>
+          <a:p>
+            <a:pPr>
+              <a:lnSpc>
+                <a:spcPct val="120000"/>
+              </a:lnSpc>
+            </a:pPr>
+            <a:r>
+              <a:rPr sz="919" b="0">
+                <a:solidFill>
+                  <a:srgbClr val="1E3A8A"/>
+                </a:solidFill>
+                <a:latin typeface="Microsoft YaHei"/>
+                <a:ea typeface="Microsoft YaHei"/>
+                <a:cs typeface="Microsoft YaHei"/>
+              </a:rPr>
+              <a:t>Modern Newspaper</a:t>
+            </a:r>
+          </a:p>
+        </p:txBody>
+      </p:sp>
+      <p:sp>
+        <p:nvSpPr>
+          <p:cNvPr id="61" name="Rounded Rectangle 60"/>
+          <p:cNvSpPr/>
+          <p:nvPr/>
+        </p:nvSpPr>
+        <p:spPr>
+          <a:xfrm>
+            <a:off x="8307996" y="5022558"/>
+            <a:ext cx="818963" cy="221811"/>
+          </a:xfrm>
+          <a:prstGeom prst="roundRect">
+            <a:avLst>
+              <a:gd name="adj" fmla="val 45804"/>
+            </a:avLst>
+          </a:prstGeom>
+          <a:solidFill>
+            <a:srgbClr val="DFEDFD"/>
+          </a:solidFill>
+          <a:ln>
+            <a:noFill/>
+          </a:ln>
+          <a:effectLst>
+            <a:outerShdw blurRad="25000" dist="8000" dir="5400000" rotWithShape="0">
+              <a:srgbClr val="000000">
+                <a:alpha val="8000"/>
+              </a:srgbClr>
+            </a:outerShdw>
+          </a:effectLst>
+        </p:spPr>
+        <p:style>
+          <a:lnRef idx="1">
+            <a:schemeClr val="accent1"/>
+          </a:lnRef>
+          <a:fillRef idx="3">
+            <a:schemeClr val="accent1"/>
+          </a:fillRef>
+          <a:effectRef idx="0">
+            <a:schemeClr val="accent1"/>
+          </a:effectRef>
+          <a:fontRef idx="minor">
+            <a:schemeClr val="lt1"/>
+          </a:fontRef>
+        </p:style>
+        <p:txBody>
+          <a:bodyPr rtlCol="0" anchor="ctr"/>
+          <a:lstStyle/>
+          <a:p>
+            <a:pPr algn="ctr"/>
+          </a:p>
+        </p:txBody>
+      </p:sp>
+      <p:sp>
+        <p:nvSpPr>
+          <p:cNvPr id="62" name="TextBox 61"/>
+          <p:cNvSpPr txBox="1"/>
+          <p:nvPr/>
+        </p:nvSpPr>
+        <p:spPr>
+          <a:xfrm>
+            <a:off x="8307996" y="5022558"/>
+            <a:ext cx="1612418" cy="221811"/>
+          </a:xfrm>
+          <a:prstGeom prst="rect">
+            <a:avLst/>
+          </a:prstGeom>
+          <a:noFill/>
+        </p:spPr>
+        <p:txBody>
+          <a:bodyPr wrap="none" lIns="84666" rIns="84666" tIns="25400" bIns="25400">
+            <a:normAutofit/>
+          </a:bodyPr>
+          <a:lstStyle/>
+          <a:p>
+            <a:pPr>
+              <a:lnSpc>
+                <a:spcPct val="120000"/>
+              </a:lnSpc>
+            </a:pPr>
+            <a:r>
+              <a:rPr sz="919" b="0">
+                <a:solidFill>
+                  <a:srgbClr val="1E3A8A"/>
+                </a:solidFill>
+                <a:latin typeface="Microsoft YaHei"/>
+                <a:ea typeface="Microsoft YaHei"/>
+                <a:cs typeface="Microsoft YaHei"/>
+              </a:rPr>
+              <a:t>Neo-Retro Dev</a:t>
+            </a:r>
+          </a:p>
+        </p:txBody>
+      </p:sp>
+      <p:sp>
+        <p:nvSpPr>
+          <p:cNvPr id="63" name="Rounded Rectangle 62"/>
+          <p:cNvSpPr/>
+          <p:nvPr/>
+        </p:nvSpPr>
+        <p:spPr>
+          <a:xfrm>
+            <a:off x="2081275" y="5500402"/>
+            <a:ext cx="169333" cy="334467"/>
+          </a:xfrm>
+          <a:prstGeom prst="roundRect">
+            <a:avLst>
+              <a:gd name="adj" fmla="val 50000"/>
+            </a:avLst>
+          </a:prstGeom>
+          <a:solidFill>
+            <a:srgbClr val="2563EB"/>
+          </a:solidFill>
+          <a:ln>
+            <a:noFill/>
+          </a:ln>
+          <a:effectLst>
+            <a:outerShdw blurRad="25000" dist="8000" dir="5400000" rotWithShape="0">
+              <a:srgbClr val="000000">
+                <a:alpha val="8000"/>
+              </a:srgbClr>
+            </a:outerShdw>
+          </a:effectLst>
+        </p:spPr>
+        <p:style>
+          <a:lnRef idx="1">
+            <a:schemeClr val="accent1"/>
+          </a:lnRef>
+          <a:fillRef idx="3">
+            <a:schemeClr val="accent1"/>
+          </a:fillRef>
+          <a:effectRef idx="0">
+            <a:schemeClr val="accent1"/>
+          </a:effectRef>
+          <a:fontRef idx="minor">
+            <a:schemeClr val="lt1"/>
+          </a:fontRef>
+        </p:style>
+        <p:txBody>
+          <a:bodyPr rtlCol="0" anchor="ctr"/>
+          <a:lstStyle/>
+          <a:p>
+            <a:pPr algn="ctr"/>
+          </a:p>
+        </p:txBody>
+      </p:sp>
+      <p:sp>
+        <p:nvSpPr>
+          <p:cNvPr id="64" name="Rounded Rectangle 63"/>
+          <p:cNvSpPr/>
+          <p:nvPr/>
+        </p:nvSpPr>
+        <p:spPr>
+          <a:xfrm>
+            <a:off x="2115142" y="5500402"/>
+            <a:ext cx="7958666" cy="334467"/>
+          </a:xfrm>
+          <a:prstGeom prst="roundRect">
+            <a:avLst>
+              <a:gd name="adj" fmla="val 30376"/>
+            </a:avLst>
+          </a:prstGeom>
+          <a:solidFill>
+            <a:srgbClr val="E1EEFD"/>
+          </a:solidFill>
+          <a:ln>
+            <a:noFill/>
+          </a:ln>
+          <a:effectLst>
+            <a:outerShdw blurRad="25000" dist="8000" dir="5400000" rotWithShape="0">
+              <a:srgbClr val="000000">
+                <a:alpha val="8000"/>
+              </a:srgbClr>
+            </a:outerShdw>
+          </a:effectLst>
+        </p:spPr>
+        <p:style>
+          <a:lnRef idx="1">
+            <a:schemeClr val="accent1"/>
+          </a:lnRef>
+          <a:fillRef idx="3">
+            <a:schemeClr val="accent1"/>
+          </a:fillRef>
+          <a:effectRef idx="0">
+            <a:schemeClr val="accent1"/>
+          </a:effectRef>
+          <a:fontRef idx="minor">
+            <a:schemeClr val="lt1"/>
+          </a:fontRef>
+        </p:style>
+        <p:txBody>
+          <a:bodyPr rtlCol="0" anchor="ctr"/>
+          <a:lstStyle/>
+          <a:p>
+            <a:pPr algn="ctr"/>
+          </a:p>
+        </p:txBody>
+      </p:sp>
+      <p:sp>
+        <p:nvSpPr>
+          <p:cNvPr id="65" name="Rectangle 64"/>
+          <p:cNvSpPr/>
+          <p:nvPr/>
+        </p:nvSpPr>
+        <p:spPr>
+          <a:xfrm>
+            <a:off x="10065342" y="5500402"/>
+            <a:ext cx="8466" cy="334467"/>
+          </a:xfrm>
+          <a:prstGeom prst="rect">
+            <a:avLst/>
+          </a:prstGeom>
+          <a:solidFill>
+            <a:srgbClr val="2563EB"/>
+          </a:solidFill>
+          <a:ln>
+            <a:noFill/>
+          </a:ln>
+        </p:spPr>
+        <p:style>
+          <a:lnRef idx="1">
+            <a:schemeClr val="accent1"/>
+          </a:lnRef>
+          <a:fillRef idx="3">
+            <a:schemeClr val="accent1"/>
+          </a:fillRef>
+          <a:effectRef idx="2">
+            <a:schemeClr val="accent1"/>
+          </a:effectRef>
+          <a:fontRef idx="minor">
+            <a:schemeClr val="lt1"/>
+          </a:fontRef>
+        </p:style>
+        <p:txBody>
+          <a:bodyPr rtlCol="0" anchor="ctr"/>
+          <a:lstStyle/>
+          <a:p>
+            <a:pPr algn="ctr"/>
+          </a:p>
+        </p:txBody>
+      </p:sp>
+      <p:sp>
+        <p:nvSpPr>
+          <p:cNvPr id="66" name="Rectangle 65"/>
+          <p:cNvSpPr/>
+          <p:nvPr/>
+        </p:nvSpPr>
+        <p:spPr>
+          <a:xfrm>
+            <a:off x="2115142" y="5500402"/>
+            <a:ext cx="7958666" cy="8466"/>
+          </a:xfrm>
+          <a:prstGeom prst="rect">
+            <a:avLst/>
+          </a:prstGeom>
+          <a:solidFill>
+            <a:srgbClr val="2563EB"/>
+          </a:solidFill>
+          <a:ln>
+            <a:noFill/>
+          </a:ln>
+        </p:spPr>
+        <p:style>
+          <a:lnRef idx="1">
+            <a:schemeClr val="accent1"/>
+          </a:lnRef>
+          <a:fillRef idx="3">
+            <a:schemeClr val="accent1"/>
+          </a:fillRef>
+          <a:effectRef idx="2">
+            <a:schemeClr val="accent1"/>
+          </a:effectRef>
+          <a:fontRef idx="minor">
+            <a:schemeClr val="lt1"/>
+          </a:fontRef>
+        </p:style>
+        <p:txBody>
+          <a:bodyPr rtlCol="0" anchor="ctr"/>
+          <a:lstStyle/>
+          <a:p>
+            <a:pPr algn="ctr"/>
+          </a:p>
+        </p:txBody>
+      </p:sp>
+      <p:sp>
+        <p:nvSpPr>
+          <p:cNvPr id="67" name="TextBox 66"/>
+          <p:cNvSpPr txBox="1"/>
+          <p:nvPr/>
+        </p:nvSpPr>
+        <p:spPr>
+          <a:xfrm>
+            <a:off x="2115142" y="5500402"/>
+            <a:ext cx="7958666" cy="334467"/>
+          </a:xfrm>
+          <a:prstGeom prst="rect">
+            <a:avLst/>
+          </a:prstGeom>
+          <a:noFill/>
+        </p:spPr>
+        <p:txBody>
+          <a:bodyPr wrap="none" lIns="118533" rIns="118533" tIns="76200" bIns="76200">
+            <a:normAutofit/>
+          </a:bodyPr>
+          <a:lstStyle/>
+          <a:p>
+            <a:pPr>
+              <a:lnSpc>
+                <a:spcPct val="160000"/>
+              </a:lnSpc>
+            </a:pPr>
+            <a:r>
               <a:rPr sz="1010" b="0">
                 <a:solidFill>
                   <a:srgbClr val="334155"/>
@@ -9125,7 +11099,7 @@
       </p:sp>
       <p:sp>
         <p:nvSpPr>
-          <p:cNvPr id="26" name="TextBox 25"/>
+          <p:cNvPr id="68" name="TextBox 67"/>
           <p:cNvSpPr txBox="1"/>
           <p:nvPr/>
         </p:nvSpPr>
@@ -9158,7 +11132,7 @@
       </p:sp>
       <p:sp>
         <p:nvSpPr>
-          <p:cNvPr id="27" name="Rounded Rectangle 26"/>
+          <p:cNvPr id="69" name="Rounded Rectangle 68"/>
           <p:cNvSpPr/>
           <p:nvPr/>
         </p:nvSpPr>
@@ -9201,7 +11175,7 @@
       </p:sp>
       <p:sp>
         <p:nvSpPr>
-          <p:cNvPr id="28" name="Rounded Rectangle 27"/>
+          <p:cNvPr id="70" name="Rounded Rectangle 69"/>
           <p:cNvSpPr/>
           <p:nvPr/>
         </p:nvSpPr>
@@ -9244,7 +11218,7 @@
       </p:sp>
       <p:sp>
         <p:nvSpPr>
-          <p:cNvPr id="29" name="Rounded Rectangle 28"/>
+          <p:cNvPr id="71" name="Rounded Rectangle 70"/>
           <p:cNvSpPr/>
           <p:nvPr/>
         </p:nvSpPr>
@@ -9287,7 +11261,7 @@
       </p:sp>
       <p:sp>
         <p:nvSpPr>
-          <p:cNvPr id="30" name="Rounded Rectangle 29"/>
+          <p:cNvPr id="72" name="Rounded Rectangle 71"/>
           <p:cNvSpPr/>
           <p:nvPr/>
         </p:nvSpPr>
@@ -9330,7 +11304,7 @@
       </p:sp>
       <p:sp>
         <p:nvSpPr>
-          <p:cNvPr id="31" name="Rounded Rectangle 30"/>
+          <p:cNvPr id="73" name="Rounded Rectangle 72"/>
           <p:cNvSpPr/>
           <p:nvPr/>
         </p:nvSpPr>
@@ -9373,7 +11347,7 @@
       </p:sp>
       <p:sp>
         <p:nvSpPr>
-          <p:cNvPr id="32" name="Rounded Rectangle 31"/>
+          <p:cNvPr id="74" name="Rounded Rectangle 73"/>
           <p:cNvSpPr/>
           <p:nvPr/>
         </p:nvSpPr>
@@ -9416,7 +11390,7 @@
       </p:sp>
       <p:sp>
         <p:nvSpPr>
-          <p:cNvPr id="33" name="Rounded Rectangle 32"/>
+          <p:cNvPr id="75" name="Rounded Rectangle 74"/>
           <p:cNvSpPr/>
           <p:nvPr/>
         </p:nvSpPr>
@@ -9459,7 +11433,7 @@
       </p:sp>
       <p:sp>
         <p:nvSpPr>
-          <p:cNvPr id="34" name="Rounded Rectangle 33"/>
+          <p:cNvPr id="76" name="Rounded Rectangle 75"/>
           <p:cNvSpPr/>
           <p:nvPr/>
         </p:nvSpPr>
@@ -9502,7 +11476,7 @@
       </p:sp>
       <p:sp>
         <p:nvSpPr>
-          <p:cNvPr id="35" name="Rounded Rectangle 34"/>
+          <p:cNvPr id="77" name="Rounded Rectangle 76"/>
           <p:cNvSpPr/>
           <p:nvPr/>
         </p:nvSpPr>
@@ -9545,7 +11519,7 @@
       </p:sp>
       <p:sp>
         <p:nvSpPr>
-          <p:cNvPr id="36" name="Rounded Rectangle 35"/>
+          <p:cNvPr id="78" name="Rounded Rectangle 77"/>
           <p:cNvSpPr/>
           <p:nvPr/>
         </p:nvSpPr>
@@ -10289,7 +12263,7 @@
         </p:nvSpPr>
         <p:spPr>
           <a:xfrm>
-            <a:off x="2453809" y="1330770"/>
+            <a:off x="2453809" y="1623680"/>
             <a:ext cx="386080" cy="169333"/>
           </a:xfrm>
           <a:prstGeom prst="roundRect">
@@ -10343,7 +12317,7 @@
         </p:nvSpPr>
         <p:spPr>
           <a:xfrm>
-            <a:off x="2453809" y="1330770"/>
+            <a:off x="2453809" y="1623680"/>
             <a:ext cx="386080" cy="169333"/>
           </a:xfrm>
           <a:prstGeom prst="rect">
@@ -10384,7 +12358,7 @@
         </p:nvSpPr>
         <p:spPr>
           <a:xfrm>
-            <a:off x="2453809" y="1618637"/>
+            <a:off x="2453809" y="1911547"/>
             <a:ext cx="7281333" cy="422656"/>
           </a:xfrm>
           <a:prstGeom prst="rect">
@@ -10422,7 +12396,7 @@
         </p:nvSpPr>
         <p:spPr>
           <a:xfrm>
-            <a:off x="2453809" y="2160165"/>
+            <a:off x="2453809" y="2453075"/>
             <a:ext cx="474133" cy="25400"/>
           </a:xfrm>
           <a:prstGeom prst="roundRect">
@@ -10474,8 +12448,8 @@
         </p:nvSpPr>
         <p:spPr>
           <a:xfrm>
-            <a:off x="457200" y="2761298"/>
-            <a:ext cx="11274552" cy="1002621"/>
+            <a:off x="2454719" y="2597008"/>
+            <a:ext cx="294639" cy="166582"/>
           </a:xfrm>
           <a:prstGeom prst="rect">
             <a:avLst/>
@@ -10483,7 +12457,7 @@
           <a:noFill/>
         </p:spPr>
         <p:txBody>
-          <a:bodyPr wrap="none" lIns="152400" rIns="152400" tIns="118533" bIns="118533">
+          <a:bodyPr wrap="none" lIns="0" rIns="0" tIns="0" bIns="0">
             <a:normAutofit/>
           </a:bodyPr>
           <a:lstStyle/>
@@ -10493,6 +12467,14 @@
                 <a:spcPct val="120000"/>
               </a:lnSpc>
             </a:pPr>
+            <a:r>
+              <a:rPr sz="1800" b="0">
+                <a:latin typeface="Microsoft YaHei"/>
+                <a:ea typeface="Microsoft YaHei"/>
+                <a:cs typeface="Microsoft YaHei"/>
+              </a:rPr>
+              <a:t>✏</a:t>
+            </a:r>
           </a:p>
         </p:txBody>
       </p:sp>
@@ -10504,8 +12486,8 @@
         </p:nvSpPr>
         <p:spPr>
           <a:xfrm>
-            <a:off x="457200" y="2761298"/>
-            <a:ext cx="11274552" cy="904465"/>
+            <a:off x="2795079" y="2597008"/>
+            <a:ext cx="1726321" cy="137160"/>
           </a:xfrm>
           <a:prstGeom prst="rect">
             <a:avLst/>
@@ -10513,7 +12495,7 @@
           <a:noFill/>
         </p:spPr>
         <p:txBody>
-          <a:bodyPr wrap="none" lIns="152400" rIns="152400" tIns="118533" bIns="118533">
+          <a:bodyPr wrap="none" lIns="0" rIns="0" tIns="0" bIns="0">
             <a:normAutofit/>
           </a:bodyPr>
           <a:lstStyle/>
@@ -10523,6 +12505,14 @@
                 <a:spcPct val="120000"/>
               </a:lnSpc>
             </a:pPr>
+            <a:r>
+              <a:rPr sz="1440" b="1">
+                <a:latin typeface="Microsoft YaHei"/>
+                <a:ea typeface="Microsoft YaHei"/>
+                <a:cs typeface="Microsoft YaHei"/>
+              </a:rPr>
+              <a:t>点击任何文本编辑</a:t>
+            </a:r>
           </a:p>
         </p:txBody>
       </p:sp>
@@ -10534,8 +12524,8 @@
         </p:nvSpPr>
         <p:spPr>
           <a:xfrm>
-            <a:off x="457200" y="2761298"/>
-            <a:ext cx="11274552" cy="1002621"/>
+            <a:off x="4567121" y="2597008"/>
+            <a:ext cx="1726321" cy="682581"/>
           </a:xfrm>
           <a:prstGeom prst="rect">
             <a:avLst/>
@@ -10543,7 +12533,70 @@
           <a:noFill/>
         </p:spPr>
         <p:txBody>
-          <a:bodyPr wrap="none" lIns="152400" rIns="152400" tIns="118533" bIns="118533">
+          <a:bodyPr wrap="square" lIns="0" rIns="0" tIns="0" bIns="0">
+            <a:spAutoFit/>
+          </a:bodyPr>
+          <a:lstStyle/>
+          <a:p>
+            <a:pPr>
+              <a:lnSpc>
+                <a:spcPct val="160000"/>
+              </a:lnSpc>
+            </a:pPr>
+            <a:r>
+              <a:rPr sz="1260" b="0">
+                <a:solidFill>
+                  <a:srgbClr val="334155"/>
+                </a:solidFill>
+                <a:latin typeface="Microsoft YaHei"/>
+                <a:ea typeface="Microsoft YaHei"/>
+                <a:cs typeface="Microsoft YaHei"/>
+              </a:rPr>
+              <a:t xml:space="preserve">每个标题、段落和列表项变成 </a:t>
+            </a:r>
+            <a:r>
+              <a:rPr sz="1260" b="0">
+                <a:solidFill>
+                  <a:srgbClr val="1E3A8A"/>
+                </a:solidFill>
+                <a:latin typeface="Microsoft YaHei"/>
+                <a:ea typeface="Microsoft YaHei"/>
+                <a:cs typeface="Microsoft YaHei"/>
+              </a:rPr>
+              <a:t>contenteditable</a:t>
+            </a:r>
+            <a:r>
+              <a:rPr sz="1260" b="0">
+                <a:solidFill>
+                  <a:srgbClr val="334155"/>
+                </a:solidFill>
+                <a:latin typeface="Microsoft YaHei"/>
+                <a:ea typeface="Microsoft YaHei"/>
+                <a:cs typeface="Microsoft YaHei"/>
+              </a:rPr>
+              <a:t>。无需开发者工具。</a:t>
+            </a:r>
+          </a:p>
+        </p:txBody>
+      </p:sp>
+      <p:sp>
+        <p:nvSpPr>
+          <p:cNvPr id="9" name="TextBox 8"/>
+          <p:cNvSpPr txBox="1"/>
+          <p:nvPr/>
+        </p:nvSpPr>
+        <p:spPr>
+          <a:xfrm>
+            <a:off x="2454719" y="3325309"/>
+            <a:ext cx="294639" cy="166582"/>
+          </a:xfrm>
+          <a:prstGeom prst="rect">
+            <a:avLst/>
+          </a:prstGeom>
+          <a:noFill/>
+        </p:spPr>
+        <p:txBody>
+          <a:bodyPr wrap="none" lIns="0" rIns="0" tIns="0" bIns="0">
             <a:normAutofit/>
           </a:bodyPr>
           <a:lstStyle/>
@@ -10553,18 +12606,222 @@
                 <a:spcPct val="120000"/>
               </a:lnSpc>
             </a:pPr>
-          </a:p>
-        </p:txBody>
-      </p:sp>
-      <p:sp>
-        <p:nvSpPr>
-          <p:cNvPr id="9" name="Rounded Rectangle 8"/>
-          <p:cNvSpPr/>
-          <p:nvPr/>
-        </p:nvSpPr>
-        <p:spPr>
-          <a:xfrm>
-            <a:off x="6289192" y="2431098"/>
+            <a:r>
+              <a:rPr sz="1800" b="0">
+                <a:latin typeface="Microsoft YaHei"/>
+                <a:ea typeface="Microsoft YaHei"/>
+                <a:cs typeface="Microsoft YaHei"/>
+              </a:rPr>
+              <a:t>⌨</a:t>
+            </a:r>
+          </a:p>
+        </p:txBody>
+      </p:sp>
+      <p:sp>
+        <p:nvSpPr>
+          <p:cNvPr id="10" name="TextBox 9"/>
+          <p:cNvSpPr txBox="1"/>
+          <p:nvPr/>
+        </p:nvSpPr>
+        <p:spPr>
+          <a:xfrm>
+            <a:off x="2795079" y="3325309"/>
+            <a:ext cx="1726321" cy="266531"/>
+          </a:xfrm>
+          <a:prstGeom prst="rect">
+            <a:avLst/>
+          </a:prstGeom>
+          <a:noFill/>
+        </p:spPr>
+        <p:txBody>
+          <a:bodyPr wrap="none" lIns="0" rIns="0" tIns="0" bIns="0">
+            <a:normAutofit/>
+          </a:bodyPr>
+          <a:lstStyle/>
+          <a:p>
+            <a:pPr>
+              <a:lnSpc>
+                <a:spcPct val="120000"/>
+              </a:lnSpc>
+            </a:pPr>
+            <a:r>
+              <a:rPr sz="1440" b="1">
+                <a:latin typeface="Microsoft YaHei"/>
+                <a:ea typeface="Microsoft YaHei"/>
+                <a:cs typeface="Microsoft YaHei"/>
+              </a:rPr>
+              <a:t>键盘快捷键</a:t>
+            </a:r>
+          </a:p>
+        </p:txBody>
+      </p:sp>
+      <p:sp>
+        <p:nvSpPr>
+          <p:cNvPr id="11" name="TextBox 10"/>
+          <p:cNvSpPr txBox="1"/>
+          <p:nvPr/>
+        </p:nvSpPr>
+        <p:spPr>
+          <a:xfrm>
+            <a:off x="4567121" y="3325309"/>
+            <a:ext cx="1726321" cy="455054"/>
+          </a:xfrm>
+          <a:prstGeom prst="rect">
+            <a:avLst/>
+          </a:prstGeom>
+          <a:noFill/>
+        </p:spPr>
+        <p:txBody>
+          <a:bodyPr wrap="none" lIns="0" rIns="0" tIns="0" bIns="0">
+            <a:normAutofit/>
+          </a:bodyPr>
+          <a:lstStyle/>
+          <a:p>
+            <a:pPr>
+              <a:lnSpc>
+                <a:spcPct val="160000"/>
+              </a:lnSpc>
+            </a:pPr>
+            <a:r>
+              <a:rPr sz="1260" b="0">
+                <a:solidFill>
+                  <a:srgbClr val="334155"/>
+                </a:solidFill>
+                <a:latin typeface="Microsoft YaHei"/>
+                <a:ea typeface="Microsoft YaHei"/>
+                <a:cs typeface="Microsoft YaHei"/>
+              </a:rPr>
+              <a:t>在任何位置按 E 切换编辑模式。</a:t>
+            </a:r>
+          </a:p>
+        </p:txBody>
+      </p:sp>
+      <p:sp>
+        <p:nvSpPr>
+          <p:cNvPr id="12" name="TextBox 11"/>
+          <p:cNvSpPr txBox="1"/>
+          <p:nvPr/>
+        </p:nvSpPr>
+        <p:spPr>
+          <a:xfrm>
+            <a:off x="2454719" y="3826084"/>
+            <a:ext cx="294639" cy="166582"/>
+          </a:xfrm>
+          <a:prstGeom prst="rect">
+            <a:avLst/>
+          </a:prstGeom>
+          <a:noFill/>
+        </p:spPr>
+        <p:txBody>
+          <a:bodyPr wrap="none" lIns="0" rIns="0" tIns="0" bIns="0">
+            <a:normAutofit/>
+          </a:bodyPr>
+          <a:lstStyle/>
+          <a:p>
+            <a:pPr>
+              <a:lnSpc>
+                <a:spcPct val="120000"/>
+              </a:lnSpc>
+            </a:pPr>
+            <a:r>
+              <a:rPr sz="1800" b="0">
+                <a:latin typeface="Microsoft YaHei"/>
+                <a:ea typeface="Microsoft YaHei"/>
+                <a:cs typeface="Microsoft YaHei"/>
+              </a:rPr>
+              <a:t>💾</a:t>
+            </a:r>
+          </a:p>
+        </p:txBody>
+      </p:sp>
+      <p:sp>
+        <p:nvSpPr>
+          <p:cNvPr id="13" name="TextBox 12"/>
+          <p:cNvSpPr txBox="1"/>
+          <p:nvPr/>
+        </p:nvSpPr>
+        <p:spPr>
+          <a:xfrm>
+            <a:off x="2795079" y="3826084"/>
+            <a:ext cx="1726321" cy="137160"/>
+          </a:xfrm>
+          <a:prstGeom prst="rect">
+            <a:avLst/>
+          </a:prstGeom>
+          <a:noFill/>
+        </p:spPr>
+        <p:txBody>
+          <a:bodyPr wrap="none" lIns="0" rIns="0" tIns="0" bIns="0">
+            <a:normAutofit/>
+          </a:bodyPr>
+          <a:lstStyle/>
+          <a:p>
+            <a:pPr>
+              <a:lnSpc>
+                <a:spcPct val="120000"/>
+              </a:lnSpc>
+            </a:pPr>
+            <a:r>
+              <a:rPr sz="1440" b="1">
+                <a:latin typeface="Microsoft YaHei"/>
+                <a:ea typeface="Microsoft YaHei"/>
+                <a:cs typeface="Microsoft YaHei"/>
+              </a:rPr>
+              <a:t>Ctrl+S 保存</a:t>
+            </a:r>
+          </a:p>
+        </p:txBody>
+      </p:sp>
+      <p:sp>
+        <p:nvSpPr>
+          <p:cNvPr id="14" name="TextBox 13"/>
+          <p:cNvSpPr txBox="1"/>
+          <p:nvPr/>
+        </p:nvSpPr>
+        <p:spPr>
+          <a:xfrm>
+            <a:off x="4567121" y="3826084"/>
+            <a:ext cx="1726321" cy="682581"/>
+          </a:xfrm>
+          <a:prstGeom prst="rect">
+            <a:avLst/>
+          </a:prstGeom>
+          <a:noFill/>
+        </p:spPr>
+        <p:txBody>
+          <a:bodyPr wrap="square" lIns="0" rIns="0" tIns="0" bIns="0">
+            <a:spAutoFit/>
+          </a:bodyPr>
+          <a:lstStyle/>
+          <a:p>
+            <a:pPr>
+              <a:lnSpc>
+                <a:spcPct val="160000"/>
+              </a:lnSpc>
+            </a:pPr>
+            <a:r>
+              <a:rPr sz="1260" b="0">
+                <a:solidFill>
+                  <a:srgbClr val="334155"/>
+                </a:solidFill>
+                <a:latin typeface="Microsoft YaHei"/>
+                <a:ea typeface="Microsoft YaHei"/>
+                <a:cs typeface="Microsoft YaHei"/>
+              </a:rPr>
+              <a:t>保存为网页或下载文件。备注实时同步到演讲者窗口。</a:t>
+            </a:r>
+          </a:p>
+        </p:txBody>
+      </p:sp>
+      <p:sp>
+        <p:nvSpPr>
+          <p:cNvPr id="15" name="Rounded Rectangle 14"/>
+          <p:cNvSpPr/>
+          <p:nvPr/>
+        </p:nvSpPr>
+        <p:spPr>
+          <a:xfrm>
+            <a:off x="6289192" y="2724008"/>
             <a:ext cx="3318040" cy="914400"/>
           </a:xfrm>
           <a:prstGeom prst="roundRect">
@@ -10610,246 +12867,22 @@
       </p:sp>
       <p:sp>
         <p:nvSpPr>
-          <p:cNvPr id="10" name="TextBox 9"/>
-          <p:cNvSpPr txBox="1"/>
-          <p:nvPr/>
-        </p:nvSpPr>
-        <p:spPr>
-          <a:xfrm>
-            <a:off x="7648492" y="3391218"/>
-            <a:ext cx="599440" cy="137160"/>
-          </a:xfrm>
-          <a:prstGeom prst="rect">
-            <a:avLst/>
-          </a:prstGeom>
-          <a:noFill/>
-        </p:spPr>
-        <p:txBody>
-          <a:bodyPr wrap="none" lIns="67733" rIns="67733" tIns="16933" bIns="16933">
-            <a:normAutofit/>
-          </a:bodyPr>
-          <a:lstStyle/>
-          <a:p>
-            <a:pPr>
-              <a:lnSpc>
-                <a:spcPct val="120000"/>
-              </a:lnSpc>
-            </a:pPr>
-            <a:r>
-              <a:rPr sz="750" b="1">
-                <a:solidFill>
-                  <a:srgbClr val="2563EB"/>
-                </a:solidFill>
-                <a:latin typeface="Microsoft YaHei"/>
-                <a:ea typeface="Microsoft YaHei"/>
-                <a:cs typeface="Microsoft YaHei"/>
-              </a:rPr>
-              <a:t>编辑模式激活</a:t>
-            </a:r>
-          </a:p>
-        </p:txBody>
-      </p:sp>
-      <p:sp>
-        <p:nvSpPr>
-          <p:cNvPr id="11" name="TextBox 10"/>
-          <p:cNvSpPr txBox="1"/>
-          <p:nvPr/>
-        </p:nvSpPr>
-        <p:spPr>
-          <a:xfrm>
-            <a:off x="6289192" y="3574098"/>
-            <a:ext cx="3318040" cy="167124"/>
-          </a:xfrm>
-          <a:prstGeom prst="rect">
-            <a:avLst/>
-          </a:prstGeom>
-          <a:noFill/>
-        </p:spPr>
-        <p:txBody>
-          <a:bodyPr wrap="none" lIns="33866" rIns="33866" tIns="16933" bIns="16933">
-            <a:normAutofit/>
-          </a:bodyPr>
-          <a:lstStyle/>
-          <a:p>
-            <a:pPr>
-              <a:lnSpc>
-                <a:spcPct val="120000"/>
-              </a:lnSpc>
-            </a:pPr>
-            <a:r>
-              <a:rPr sz="1440" b="1">
-                <a:latin typeface="Microsoft YaHei"/>
-                <a:ea typeface="Microsoft YaHei"/>
-                <a:cs typeface="Microsoft YaHei"/>
-              </a:rPr>
-              <a:t>此标题可编辑 ↗</a:t>
-            </a:r>
-          </a:p>
-        </p:txBody>
-      </p:sp>
-      <p:sp>
-        <p:nvSpPr>
-          <p:cNvPr id="12" name="TextBox 11"/>
-          <p:cNvSpPr txBox="1"/>
-          <p:nvPr/>
-        </p:nvSpPr>
-        <p:spPr>
-          <a:xfrm>
-            <a:off x="6289192" y="3786943"/>
-            <a:ext cx="3318040" cy="228475"/>
-          </a:xfrm>
-          <a:prstGeom prst="rect">
-            <a:avLst/>
-          </a:prstGeom>
-          <a:noFill/>
-        </p:spPr>
-        <p:txBody>
-          <a:bodyPr wrap="none" lIns="50800" rIns="50800" tIns="25400" bIns="25400">
-            <a:normAutofit/>
-          </a:bodyPr>
-          <a:lstStyle/>
-          <a:p>
-            <a:pPr>
-              <a:lnSpc>
-                <a:spcPct val="160000"/>
-              </a:lnSpc>
-            </a:pPr>
-            <a:r>
-              <a:rPr sz="980" b="0">
-                <a:solidFill>
-                  <a:srgbClr val="334155"/>
-                </a:solidFill>
-                <a:latin typeface="Microsoft YaHei"/>
-                <a:ea typeface="Microsoft YaHei"/>
-                <a:cs typeface="Microsoft YaHei"/>
-              </a:rPr>
-              <a:t>此段落也可以。点击任何高亮元素开始输入。</a:t>
-            </a:r>
-          </a:p>
-        </p:txBody>
-      </p:sp>
-      <p:sp>
-        <p:nvSpPr>
-          <p:cNvPr id="13" name="TextBox 12"/>
-          <p:cNvSpPr txBox="1"/>
-          <p:nvPr/>
-        </p:nvSpPr>
-        <p:spPr>
-          <a:xfrm>
-            <a:off x="6289192" y="4061138"/>
-            <a:ext cx="3318040" cy="488912"/>
-          </a:xfrm>
-          <a:prstGeom prst="rect">
-            <a:avLst/>
-          </a:prstGeom>
-          <a:noFill/>
-        </p:spPr>
-        <p:txBody>
-          <a:bodyPr wrap="none" lIns="50800" rIns="50800" tIns="16933" bIns="16933">
-            <a:normAutofit/>
-          </a:bodyPr>
-          <a:lstStyle/>
-          <a:p>
-            <a:pPr>
-              <a:lnSpc>
-                <a:spcPct val="160000"/>
-              </a:lnSpc>
-            </a:pPr>
-            <a:r>
-              <a:rPr sz="881" b="0">
-                <a:solidFill>
-                  <a:srgbClr val="388BFD"/>
-                </a:solidFill>
-                <a:latin typeface="Microsoft YaHei"/>
-                <a:ea typeface="Microsoft YaHei"/>
-                <a:cs typeface="Microsoft YaHei"/>
-              </a:rPr>
-              <a:t xml:space="preserve">▶ </a:t>
-            </a:r>
-            <a:r>
-              <a:rPr sz="1260" b="0">
-                <a:solidFill>
-                  <a:srgbClr val="334155"/>
-                </a:solidFill>
-                <a:latin typeface="Microsoft YaHei"/>
-                <a:ea typeface="Microsoft YaHei"/>
-                <a:cs typeface="Microsoft YaHei"/>
-              </a:rPr>
-              <a:t>列表项可编辑</a:t>
-            </a:r>
-          </a:p>
-        </p:txBody>
-      </p:sp>
-      <p:sp>
-        <p:nvSpPr>
-          <p:cNvPr id="14" name="TextBox 13"/>
-          <p:cNvSpPr txBox="1"/>
-          <p:nvPr/>
-        </p:nvSpPr>
-        <p:spPr>
-          <a:xfrm>
-            <a:off x="6289192" y="4595770"/>
-            <a:ext cx="3318040" cy="261385"/>
-          </a:xfrm>
-          <a:prstGeom prst="rect">
-            <a:avLst/>
-          </a:prstGeom>
-          <a:noFill/>
-        </p:spPr>
-        <p:txBody>
-          <a:bodyPr wrap="none" lIns="50800" rIns="50800" tIns="16933" bIns="16933">
-            <a:normAutofit/>
-          </a:bodyPr>
-          <a:lstStyle/>
-          <a:p>
-            <a:pPr>
-              <a:lnSpc>
-                <a:spcPct val="160000"/>
-              </a:lnSpc>
-            </a:pPr>
-            <a:r>
-              <a:rPr sz="881" b="0">
-                <a:solidFill>
-                  <a:srgbClr val="388BFD"/>
-                </a:solidFill>
-                <a:latin typeface="Microsoft YaHei"/>
-                <a:ea typeface="Microsoft YaHei"/>
-                <a:cs typeface="Microsoft YaHei"/>
-              </a:rPr>
-              <a:t xml:space="preserve">▶ </a:t>
-            </a:r>
-            <a:r>
-              <a:rPr sz="1260" b="0">
-                <a:solidFill>
-                  <a:srgbClr val="334155"/>
-                </a:solidFill>
-                <a:latin typeface="Microsoft YaHei"/>
-                <a:ea typeface="Microsoft YaHei"/>
-                <a:cs typeface="Microsoft YaHei"/>
-              </a:rPr>
-              <a:t>统计数据、标签、标注 —— 一切都可以</a:t>
-            </a:r>
-          </a:p>
-        </p:txBody>
-      </p:sp>
-      <p:sp>
-        <p:nvSpPr>
-          <p:cNvPr id="15" name="Rounded Rectangle 14"/>
-          <p:cNvSpPr/>
-          <p:nvPr/>
-        </p:nvSpPr>
-        <p:spPr>
-          <a:xfrm>
-            <a:off x="6255325" y="4902875"/>
-            <a:ext cx="169333" cy="770392"/>
+          <p:cNvPr id="16" name="Rounded Rectangle 15"/>
+          <p:cNvSpPr/>
+          <p:nvPr/>
+        </p:nvSpPr>
+        <p:spPr>
+          <a:xfrm>
+            <a:off x="6289192" y="3684128"/>
+            <a:ext cx="581152" cy="137160"/>
           </a:xfrm>
           <a:prstGeom prst="roundRect">
             <a:avLst>
-              <a:gd name="adj" fmla="val 50000"/>
+              <a:gd name="adj" fmla="val 49382"/>
             </a:avLst>
           </a:prstGeom>
           <a:solidFill>
-            <a:srgbClr val="2563EB"/>
+            <a:srgbClr val="D7E7FC"/>
           </a:solidFill>
           <a:ln>
             <a:noFill/>
@@ -10886,22 +12919,246 @@
       </p:sp>
       <p:sp>
         <p:nvSpPr>
-          <p:cNvPr id="16" name="Rounded Rectangle 15"/>
-          <p:cNvSpPr/>
-          <p:nvPr/>
-        </p:nvSpPr>
-        <p:spPr>
-          <a:xfrm>
-            <a:off x="6289192" y="4902875"/>
-            <a:ext cx="3318040" cy="770392"/>
+          <p:cNvPr id="17" name="TextBox 16"/>
+          <p:cNvSpPr txBox="1"/>
+          <p:nvPr/>
+        </p:nvSpPr>
+        <p:spPr>
+          <a:xfrm>
+            <a:off x="6289192" y="3684128"/>
+            <a:ext cx="3318040" cy="137160"/>
+          </a:xfrm>
+          <a:prstGeom prst="rect">
+            <a:avLst/>
+          </a:prstGeom>
+          <a:noFill/>
+        </p:spPr>
+        <p:txBody>
+          <a:bodyPr wrap="none" lIns="67733" rIns="67733" tIns="16933" bIns="16933">
+            <a:normAutofit/>
+          </a:bodyPr>
+          <a:lstStyle/>
+          <a:p>
+            <a:pPr>
+              <a:lnSpc>
+                <a:spcPct val="120000"/>
+              </a:lnSpc>
+            </a:pPr>
+            <a:r>
+              <a:rPr sz="750" b="1">
+                <a:solidFill>
+                  <a:srgbClr val="2563EB"/>
+                </a:solidFill>
+                <a:latin typeface="Microsoft YaHei"/>
+                <a:ea typeface="Microsoft YaHei"/>
+                <a:cs typeface="Microsoft YaHei"/>
+              </a:rPr>
+              <a:t>编辑模式激活</a:t>
+            </a:r>
+          </a:p>
+        </p:txBody>
+      </p:sp>
+      <p:sp>
+        <p:nvSpPr>
+          <p:cNvPr id="18" name="TextBox 17"/>
+          <p:cNvSpPr txBox="1"/>
+          <p:nvPr/>
+        </p:nvSpPr>
+        <p:spPr>
+          <a:xfrm>
+            <a:off x="6289192" y="3867008"/>
+            <a:ext cx="3318040" cy="167124"/>
+          </a:xfrm>
+          <a:prstGeom prst="rect">
+            <a:avLst/>
+          </a:prstGeom>
+          <a:noFill/>
+        </p:spPr>
+        <p:txBody>
+          <a:bodyPr wrap="none" lIns="33866" rIns="33866" tIns="16933" bIns="16933">
+            <a:normAutofit/>
+          </a:bodyPr>
+          <a:lstStyle/>
+          <a:p>
+            <a:pPr>
+              <a:lnSpc>
+                <a:spcPct val="120000"/>
+              </a:lnSpc>
+            </a:pPr>
+            <a:r>
+              <a:rPr sz="1440" b="1">
+                <a:latin typeface="Microsoft YaHei"/>
+                <a:ea typeface="Microsoft YaHei"/>
+                <a:cs typeface="Microsoft YaHei"/>
+              </a:rPr>
+              <a:t>此标题可编辑 ↗</a:t>
+            </a:r>
+          </a:p>
+        </p:txBody>
+      </p:sp>
+      <p:sp>
+        <p:nvSpPr>
+          <p:cNvPr id="19" name="TextBox 18"/>
+          <p:cNvSpPr txBox="1"/>
+          <p:nvPr/>
+        </p:nvSpPr>
+        <p:spPr>
+          <a:xfrm>
+            <a:off x="6289192" y="4079852"/>
+            <a:ext cx="3318040" cy="228475"/>
+          </a:xfrm>
+          <a:prstGeom prst="rect">
+            <a:avLst/>
+          </a:prstGeom>
+          <a:noFill/>
+        </p:spPr>
+        <p:txBody>
+          <a:bodyPr wrap="none" lIns="50800" rIns="50800" tIns="25400" bIns="25400">
+            <a:normAutofit/>
+          </a:bodyPr>
+          <a:lstStyle/>
+          <a:p>
+            <a:pPr>
+              <a:lnSpc>
+                <a:spcPct val="160000"/>
+              </a:lnSpc>
+            </a:pPr>
+            <a:r>
+              <a:rPr sz="980" b="0">
+                <a:solidFill>
+                  <a:srgbClr val="334155"/>
+                </a:solidFill>
+                <a:latin typeface="Microsoft YaHei"/>
+                <a:ea typeface="Microsoft YaHei"/>
+                <a:cs typeface="Microsoft YaHei"/>
+              </a:rPr>
+              <a:t>此段落也可以。点击任何高亮元素开始输入。</a:t>
+            </a:r>
+          </a:p>
+        </p:txBody>
+      </p:sp>
+      <p:sp>
+        <p:nvSpPr>
+          <p:cNvPr id="20" name="TextBox 19"/>
+          <p:cNvSpPr txBox="1"/>
+          <p:nvPr/>
+        </p:nvSpPr>
+        <p:spPr>
+          <a:xfrm>
+            <a:off x="6289192" y="4354047"/>
+            <a:ext cx="3318040" cy="488912"/>
+          </a:xfrm>
+          <a:prstGeom prst="rect">
+            <a:avLst/>
+          </a:prstGeom>
+          <a:noFill/>
+        </p:spPr>
+        <p:txBody>
+          <a:bodyPr wrap="none" lIns="50800" rIns="50800" tIns="16933" bIns="16933">
+            <a:normAutofit/>
+          </a:bodyPr>
+          <a:lstStyle/>
+          <a:p>
+            <a:pPr>
+              <a:lnSpc>
+                <a:spcPct val="160000"/>
+              </a:lnSpc>
+            </a:pPr>
+            <a:r>
+              <a:rPr sz="881" b="0">
+                <a:solidFill>
+                  <a:srgbClr val="388BFD"/>
+                </a:solidFill>
+                <a:latin typeface="Microsoft YaHei"/>
+                <a:ea typeface="Microsoft YaHei"/>
+                <a:cs typeface="Microsoft YaHei"/>
+              </a:rPr>
+              <a:t xml:space="preserve">▶ </a:t>
+            </a:r>
+            <a:r>
+              <a:rPr sz="1260" b="0">
+                <a:solidFill>
+                  <a:srgbClr val="334155"/>
+                </a:solidFill>
+                <a:latin typeface="Microsoft YaHei"/>
+                <a:ea typeface="Microsoft YaHei"/>
+                <a:cs typeface="Microsoft YaHei"/>
+              </a:rPr>
+              <a:t>列表项可编辑</a:t>
+            </a:r>
+          </a:p>
+        </p:txBody>
+      </p:sp>
+      <p:sp>
+        <p:nvSpPr>
+          <p:cNvPr id="21" name="TextBox 20"/>
+          <p:cNvSpPr txBox="1"/>
+          <p:nvPr/>
+        </p:nvSpPr>
+        <p:spPr>
+          <a:xfrm>
+            <a:off x="6289192" y="4902226"/>
+            <a:ext cx="3318040" cy="261385"/>
+          </a:xfrm>
+          <a:prstGeom prst="rect">
+            <a:avLst/>
+          </a:prstGeom>
+          <a:noFill/>
+        </p:spPr>
+        <p:txBody>
+          <a:bodyPr wrap="none" lIns="50800" rIns="50800" tIns="16933" bIns="16933">
+            <a:normAutofit/>
+          </a:bodyPr>
+          <a:lstStyle/>
+          <a:p>
+            <a:pPr>
+              <a:lnSpc>
+                <a:spcPct val="160000"/>
+              </a:lnSpc>
+            </a:pPr>
+            <a:r>
+              <a:rPr sz="881" b="0">
+                <a:solidFill>
+                  <a:srgbClr val="388BFD"/>
+                </a:solidFill>
+                <a:latin typeface="Microsoft YaHei"/>
+                <a:ea typeface="Microsoft YaHei"/>
+                <a:cs typeface="Microsoft YaHei"/>
+              </a:rPr>
+              <a:t xml:space="preserve">▶ </a:t>
+            </a:r>
+            <a:r>
+              <a:rPr sz="1260" b="0">
+                <a:solidFill>
+                  <a:srgbClr val="334155"/>
+                </a:solidFill>
+                <a:latin typeface="Microsoft YaHei"/>
+                <a:ea typeface="Microsoft YaHei"/>
+                <a:cs typeface="Microsoft YaHei"/>
+              </a:rPr>
+              <a:t>统计数据、标签、标注 —— 一切都可以</a:t>
+            </a:r>
+          </a:p>
+        </p:txBody>
+      </p:sp>
+      <p:sp>
+        <p:nvSpPr>
+          <p:cNvPr id="22" name="Rounded Rectangle 21"/>
+          <p:cNvSpPr/>
+          <p:nvPr/>
+        </p:nvSpPr>
+        <p:spPr>
+          <a:xfrm>
+            <a:off x="6255325" y="5222878"/>
+            <a:ext cx="169333" cy="770392"/>
           </a:xfrm>
           <a:prstGeom prst="roundRect">
             <a:avLst>
-              <a:gd name="adj" fmla="val 13188"/>
+              <a:gd name="adj" fmla="val 50000"/>
             </a:avLst>
           </a:prstGeom>
           <a:solidFill>
-            <a:srgbClr val="E1EEFD"/>
+            <a:srgbClr val="2563EB"/>
           </a:solidFill>
           <a:ln>
             <a:noFill/>
@@ -10938,14 +13195,66 @@
       </p:sp>
       <p:sp>
         <p:nvSpPr>
-          <p:cNvPr id="17" name="TextBox 16"/>
+          <p:cNvPr id="23" name="Rounded Rectangle 22"/>
+          <p:cNvSpPr/>
+          <p:nvPr/>
+        </p:nvSpPr>
+        <p:spPr>
+          <a:xfrm>
+            <a:off x="6289192" y="5222878"/>
+            <a:ext cx="3842973" cy="770392"/>
+          </a:xfrm>
+          <a:prstGeom prst="roundRect">
+            <a:avLst>
+              <a:gd name="adj" fmla="val 13188"/>
+            </a:avLst>
+          </a:prstGeom>
+          <a:solidFill>
+            <a:srgbClr val="E1EEFD"/>
+          </a:solidFill>
+          <a:ln>
+            <a:noFill/>
+          </a:ln>
+          <a:effectLst>
+            <a:outerShdw blurRad="25000" dist="8000" dir="5400000" rotWithShape="0">
+              <a:srgbClr val="000000">
+                <a:alpha val="8000"/>
+              </a:srgbClr>
+            </a:outerShdw>
+          </a:effectLst>
+        </p:spPr>
+        <p:style>
+          <a:lnRef idx="1">
+            <a:schemeClr val="accent1"/>
+          </a:lnRef>
+          <a:fillRef idx="3">
+            <a:schemeClr val="accent1"/>
+          </a:fillRef>
+          <a:effectRef idx="0">
+            <a:schemeClr val="accent1"/>
+          </a:effectRef>
+          <a:fontRef idx="minor">
+            <a:schemeClr val="lt1"/>
+          </a:fontRef>
+        </p:style>
+        <p:txBody>
+          <a:bodyPr rtlCol="0" anchor="ctr"/>
+          <a:lstStyle/>
+          <a:p>
+            <a:pPr algn="ctr"/>
+          </a:p>
+        </p:txBody>
+      </p:sp>
+      <p:sp>
+        <p:nvSpPr>
+          <p:cNvPr id="24" name="TextBox 23"/>
           <p:cNvSpPr txBox="1"/>
           <p:nvPr/>
         </p:nvSpPr>
         <p:spPr>
           <a:xfrm>
-            <a:off x="6070441" y="5718988"/>
-            <a:ext cx="3755542" cy="567192"/>
+            <a:off x="6289192" y="5222878"/>
+            <a:ext cx="3318040" cy="567192"/>
           </a:xfrm>
           <a:prstGeom prst="rect">
             <a:avLst/>
@@ -11001,7 +13310,7 @@
       </p:sp>
       <p:sp>
         <p:nvSpPr>
-          <p:cNvPr id="18" name="TextBox 17"/>
+          <p:cNvPr id="25" name="TextBox 24"/>
           <p:cNvSpPr txBox="1"/>
           <p:nvPr/>
         </p:nvSpPr>
@@ -11034,7 +13343,7 @@
       </p:sp>
       <p:sp>
         <p:nvSpPr>
-          <p:cNvPr id="19" name="Rounded Rectangle 18"/>
+          <p:cNvPr id="26" name="Rounded Rectangle 25"/>
           <p:cNvSpPr/>
           <p:nvPr/>
         </p:nvSpPr>
@@ -11077,7 +13386,7 @@
       </p:sp>
       <p:sp>
         <p:nvSpPr>
-          <p:cNvPr id="20" name="Rounded Rectangle 19"/>
+          <p:cNvPr id="27" name="Rounded Rectangle 26"/>
           <p:cNvSpPr/>
           <p:nvPr/>
         </p:nvSpPr>
@@ -11120,7 +13429,7 @@
       </p:sp>
       <p:sp>
         <p:nvSpPr>
-          <p:cNvPr id="21" name="Rounded Rectangle 20"/>
+          <p:cNvPr id="28" name="Rounded Rectangle 27"/>
           <p:cNvSpPr/>
           <p:nvPr/>
         </p:nvSpPr>
@@ -11163,7 +13472,7 @@
       </p:sp>
       <p:sp>
         <p:nvSpPr>
-          <p:cNvPr id="22" name="Rounded Rectangle 21"/>
+          <p:cNvPr id="29" name="Rounded Rectangle 28"/>
           <p:cNvSpPr/>
           <p:nvPr/>
         </p:nvSpPr>
@@ -11206,7 +13515,7 @@
       </p:sp>
       <p:sp>
         <p:nvSpPr>
-          <p:cNvPr id="23" name="Rounded Rectangle 22"/>
+          <p:cNvPr id="30" name="Rounded Rectangle 29"/>
           <p:cNvSpPr/>
           <p:nvPr/>
         </p:nvSpPr>
@@ -11249,7 +13558,7 @@
       </p:sp>
       <p:sp>
         <p:nvSpPr>
-          <p:cNvPr id="24" name="Rounded Rectangle 23"/>
+          <p:cNvPr id="31" name="Rounded Rectangle 30"/>
           <p:cNvSpPr/>
           <p:nvPr/>
         </p:nvSpPr>
@@ -11292,7 +13601,7 @@
       </p:sp>
       <p:sp>
         <p:nvSpPr>
-          <p:cNvPr id="25" name="Rounded Rectangle 24"/>
+          <p:cNvPr id="32" name="Rounded Rectangle 31"/>
           <p:cNvSpPr/>
           <p:nvPr/>
         </p:nvSpPr>
@@ -11335,7 +13644,7 @@
       </p:sp>
       <p:sp>
         <p:nvSpPr>
-          <p:cNvPr id="26" name="Rounded Rectangle 25"/>
+          <p:cNvPr id="33" name="Rounded Rectangle 32"/>
           <p:cNvSpPr/>
           <p:nvPr/>
         </p:nvSpPr>
@@ -11378,7 +13687,7 @@
       </p:sp>
       <p:sp>
         <p:nvSpPr>
-          <p:cNvPr id="27" name="Rounded Rectangle 26"/>
+          <p:cNvPr id="34" name="Rounded Rectangle 33"/>
           <p:cNvSpPr/>
           <p:nvPr/>
         </p:nvSpPr>
@@ -11421,7 +13730,7 @@
       </p:sp>
       <p:sp>
         <p:nvSpPr>
-          <p:cNvPr id="28" name="Rounded Rectangle 27"/>
+          <p:cNvPr id="35" name="Rounded Rectangle 34"/>
           <p:cNvSpPr/>
           <p:nvPr/>
         </p:nvSpPr>
@@ -11504,7 +13813,7 @@
         </p:nvSpPr>
         <p:spPr>
           <a:xfrm>
-            <a:off x="2538476" y="1315127"/>
+            <a:off x="2538476" y="1962522"/>
             <a:ext cx="386080" cy="169333"/>
           </a:xfrm>
           <a:prstGeom prst="roundRect">
@@ -11558,7 +13867,7 @@
         </p:nvSpPr>
         <p:spPr>
           <a:xfrm>
-            <a:off x="2538476" y="1315127"/>
+            <a:off x="2538476" y="1962522"/>
             <a:ext cx="386080" cy="169333"/>
           </a:xfrm>
           <a:prstGeom prst="rect">
@@ -11599,7 +13908,7 @@
         </p:nvSpPr>
         <p:spPr>
           <a:xfrm>
-            <a:off x="2538476" y="1602994"/>
+            <a:off x="2538476" y="2250389"/>
             <a:ext cx="7112000" cy="422656"/>
           </a:xfrm>
           <a:prstGeom prst="rect">
@@ -11637,7 +13946,7 @@
         </p:nvSpPr>
         <p:spPr>
           <a:xfrm>
-            <a:off x="2538476" y="2144522"/>
+            <a:off x="2538476" y="2791917"/>
             <a:ext cx="474133" cy="25400"/>
           </a:xfrm>
           <a:prstGeom prst="roundRect">
@@ -11689,7 +13998,7 @@
         </p:nvSpPr>
         <p:spPr>
           <a:xfrm>
-            <a:off x="4131678" y="2415455"/>
+            <a:off x="4131678" y="3062850"/>
             <a:ext cx="302768" cy="137328"/>
           </a:xfrm>
           <a:prstGeom prst="rect">
@@ -11730,7 +14039,7 @@
         </p:nvSpPr>
         <p:spPr>
           <a:xfrm>
-            <a:off x="2666364" y="2598504"/>
+            <a:off x="2666364" y="3245899"/>
             <a:ext cx="3233394" cy="914400"/>
           </a:xfrm>
           <a:prstGeom prst="roundRect">
@@ -11782,8 +14091,8 @@
         </p:nvSpPr>
         <p:spPr>
           <a:xfrm>
-            <a:off x="2539365" y="3558624"/>
-            <a:ext cx="1634390" cy="457200"/>
+            <a:off x="2666364" y="4206019"/>
+            <a:ext cx="1515352" cy="241401"/>
           </a:xfrm>
           <a:prstGeom prst="rect">
             <a:avLst/>
@@ -11831,8 +14140,8 @@
         </p:nvSpPr>
         <p:spPr>
           <a:xfrm>
-            <a:off x="4173755" y="3558624"/>
-            <a:ext cx="1853003" cy="457200"/>
+            <a:off x="4181717" y="4206019"/>
+            <a:ext cx="1718042" cy="241401"/>
           </a:xfrm>
           <a:prstGeom prst="rect">
             <a:avLst/>
@@ -11883,8 +14192,8 @@
         </p:nvSpPr>
         <p:spPr>
           <a:xfrm>
-            <a:off x="2539365" y="4015824"/>
-            <a:ext cx="1634390" cy="457200"/>
+            <a:off x="2666364" y="4447421"/>
+            <a:ext cx="1515352" cy="241401"/>
           </a:xfrm>
           <a:prstGeom prst="rect">
             <a:avLst/>
@@ -11932,8 +14241,8 @@
         </p:nvSpPr>
         <p:spPr>
           <a:xfrm>
-            <a:off x="4173755" y="4015824"/>
-            <a:ext cx="1853003" cy="457200"/>
+            <a:off x="4181717" y="4447421"/>
+            <a:ext cx="1718042" cy="241401"/>
           </a:xfrm>
           <a:prstGeom prst="rect">
             <a:avLst/>
@@ -11984,8 +14293,8 @@
         </p:nvSpPr>
         <p:spPr>
           <a:xfrm>
-            <a:off x="2539365" y="4473024"/>
-            <a:ext cx="1634390" cy="457200"/>
+            <a:off x="2666364" y="4688822"/>
+            <a:ext cx="1515352" cy="241401"/>
           </a:xfrm>
           <a:prstGeom prst="rect">
             <a:avLst/>
@@ -12033,8 +14342,8 @@
         </p:nvSpPr>
         <p:spPr>
           <a:xfrm>
-            <a:off x="4173755" y="4473024"/>
-            <a:ext cx="1853003" cy="457200"/>
+            <a:off x="4181717" y="4688822"/>
+            <a:ext cx="1718042" cy="241401"/>
           </a:xfrm>
           <a:prstGeom prst="rect">
             <a:avLst/>
@@ -12085,8 +14394,8 @@
         </p:nvSpPr>
         <p:spPr>
           <a:xfrm>
-            <a:off x="2539365" y="4930224"/>
-            <a:ext cx="1634390" cy="457200"/>
+            <a:off x="2666364" y="4930224"/>
+            <a:ext cx="1515352" cy="241401"/>
           </a:xfrm>
           <a:prstGeom prst="rect">
             <a:avLst/>
@@ -12134,8 +14443,8 @@
         </p:nvSpPr>
         <p:spPr>
           <a:xfrm>
-            <a:off x="4173755" y="4930224"/>
-            <a:ext cx="1853003" cy="457200"/>
+            <a:off x="4181717" y="4930224"/>
+            <a:ext cx="1718042" cy="241401"/>
           </a:xfrm>
           <a:prstGeom prst="rect">
             <a:avLst/>
@@ -12186,8 +14495,8 @@
         </p:nvSpPr>
         <p:spPr>
           <a:xfrm>
-            <a:off x="2539365" y="5387424"/>
-            <a:ext cx="1634390" cy="457200"/>
+            <a:off x="2666364" y="5171626"/>
+            <a:ext cx="1515352" cy="241401"/>
           </a:xfrm>
           <a:prstGeom prst="rect">
             <a:avLst/>
@@ -12235,8 +14544,8 @@
         </p:nvSpPr>
         <p:spPr>
           <a:xfrm>
-            <a:off x="4173755" y="5387424"/>
-            <a:ext cx="1853003" cy="457200"/>
+            <a:off x="4181717" y="5171626"/>
+            <a:ext cx="1718042" cy="241401"/>
           </a:xfrm>
           <a:prstGeom prst="rect">
             <a:avLst/>
@@ -12287,8 +14596,8 @@
         </p:nvSpPr>
         <p:spPr>
           <a:xfrm>
-            <a:off x="2539365" y="5844624"/>
-            <a:ext cx="1634390" cy="457200"/>
+            <a:off x="2666364" y="5413027"/>
+            <a:ext cx="1515352" cy="241401"/>
           </a:xfrm>
           <a:prstGeom prst="rect">
             <a:avLst/>
@@ -12336,8 +14645,8 @@
         </p:nvSpPr>
         <p:spPr>
           <a:xfrm>
-            <a:off x="4173755" y="5844624"/>
-            <a:ext cx="1853003" cy="457200"/>
+            <a:off x="4181717" y="5413027"/>
+            <a:ext cx="1718042" cy="241401"/>
           </a:xfrm>
           <a:prstGeom prst="rect">
             <a:avLst/>
@@ -12388,7 +14697,7 @@
         </p:nvSpPr>
         <p:spPr>
           <a:xfrm>
-            <a:off x="6162192" y="2288455"/>
+            <a:off x="6162192" y="2935850"/>
             <a:ext cx="3487394" cy="137328"/>
           </a:xfrm>
           <a:prstGeom prst="rect">
@@ -12429,8 +14738,8 @@
         </p:nvSpPr>
         <p:spPr>
           <a:xfrm>
-            <a:off x="457200" y="2745655"/>
-            <a:ext cx="11274552" cy="684083"/>
+            <a:off x="6162192" y="3118899"/>
+            <a:ext cx="294639" cy="166582"/>
           </a:xfrm>
           <a:prstGeom prst="rect">
             <a:avLst/>
@@ -12438,7 +14747,7 @@
           <a:noFill/>
         </p:spPr>
         <p:txBody>
-          <a:bodyPr wrap="none" lIns="152400" rIns="152400" tIns="118533" bIns="118533">
+          <a:bodyPr wrap="none" lIns="0" rIns="0" tIns="0" bIns="0">
             <a:normAutofit/>
           </a:bodyPr>
           <a:lstStyle/>
@@ -12448,6 +14757,14 @@
                 <a:spcPct val="120000"/>
               </a:lnSpc>
             </a:pPr>
+            <a:r>
+              <a:rPr sz="1800" b="0">
+                <a:latin typeface="Microsoft YaHei"/>
+                <a:ea typeface="Microsoft YaHei"/>
+                <a:cs typeface="Microsoft YaHei"/>
+              </a:rPr>
+              <a:t>📝</a:t>
+            </a:r>
           </a:p>
         </p:txBody>
       </p:sp>
@@ -12459,8 +14776,8 @@
         </p:nvSpPr>
         <p:spPr>
           <a:xfrm>
-            <a:off x="457200" y="2745655"/>
-            <a:ext cx="11274552" cy="684083"/>
+            <a:off x="6502552" y="3118899"/>
+            <a:ext cx="1684009" cy="137160"/>
           </a:xfrm>
           <a:prstGeom prst="rect">
             <a:avLst/>
@@ -12468,7 +14785,7 @@
           <a:noFill/>
         </p:spPr>
         <p:txBody>
-          <a:bodyPr wrap="none" lIns="152400" rIns="152400" tIns="118533" bIns="118533">
+          <a:bodyPr wrap="none" lIns="0" rIns="0" tIns="0" bIns="0">
             <a:normAutofit/>
           </a:bodyPr>
           <a:lstStyle/>
@@ -12478,6 +14795,14 @@
                 <a:spcPct val="120000"/>
               </a:lnSpc>
             </a:pPr>
+            <a:r>
+              <a:rPr sz="1440" b="1">
+                <a:latin typeface="Microsoft YaHei"/>
+                <a:ea typeface="Microsoft YaHei"/>
+                <a:cs typeface="Microsoft YaHei"/>
+              </a:rPr>
+              <a:t>当前幻灯片备注</a:t>
+            </a:r>
           </a:p>
         </p:txBody>
       </p:sp>
@@ -12489,8 +14814,8 @@
         </p:nvSpPr>
         <p:spPr>
           <a:xfrm>
-            <a:off x="457200" y="2745655"/>
-            <a:ext cx="11274552" cy="866105"/>
+            <a:off x="8232281" y="3118899"/>
+            <a:ext cx="1684009" cy="364043"/>
           </a:xfrm>
           <a:prstGeom prst="rect">
             <a:avLst/>
@@ -12498,7 +14823,48 @@
           <a:noFill/>
         </p:spPr>
         <p:txBody>
-          <a:bodyPr wrap="none" lIns="152400" rIns="152400" tIns="118533" bIns="118533">
+          <a:bodyPr wrap="none" lIns="0" rIns="0" tIns="0" bIns="0">
+            <a:normAutofit/>
+          </a:bodyPr>
+          <a:lstStyle/>
+          <a:p>
+            <a:pPr>
+              <a:lnSpc>
+                <a:spcPct val="160000"/>
+              </a:lnSpc>
+            </a:pPr>
+            <a:r>
+              <a:rPr sz="1010" b="0">
+                <a:solidFill>
+                  <a:srgbClr val="334155"/>
+                </a:solidFill>
+                <a:latin typeface="Microsoft YaHei"/>
+                <a:ea typeface="Microsoft YaHei"/>
+                <a:cs typeface="Microsoft YaHei"/>
+              </a:rPr>
+              <a:t>按 P 在独立窗口查看演讲者备注。</a:t>
+            </a:r>
+          </a:p>
+        </p:txBody>
+      </p:sp>
+      <p:sp>
+        <p:nvSpPr>
+          <p:cNvPr id="24" name="TextBox 23"/>
+          <p:cNvSpPr txBox="1"/>
+          <p:nvPr/>
+        </p:nvSpPr>
+        <p:spPr>
+          <a:xfrm>
+            <a:off x="6162192" y="3528662"/>
+            <a:ext cx="294639" cy="166582"/>
+          </a:xfrm>
+          <a:prstGeom prst="rect">
+            <a:avLst/>
+          </a:prstGeom>
+          <a:noFill/>
+        </p:spPr>
+        <p:txBody>
+          <a:bodyPr wrap="none" lIns="0" rIns="0" tIns="0" bIns="0">
             <a:normAutofit/>
           </a:bodyPr>
           <a:lstStyle/>
@@ -12508,12 +14874,216 @@
                 <a:spcPct val="120000"/>
               </a:lnSpc>
             </a:pPr>
-          </a:p>
-        </p:txBody>
-      </p:sp>
-      <p:sp>
-        <p:nvSpPr>
-          <p:cNvPr id="24" name="TextBox 23"/>
+            <a:r>
+              <a:rPr sz="1800" b="0">
+                <a:latin typeface="Microsoft YaHei"/>
+                <a:ea typeface="Microsoft YaHei"/>
+                <a:cs typeface="Microsoft YaHei"/>
+              </a:rPr>
+              <a:t>⏱</a:t>
+            </a:r>
+          </a:p>
+        </p:txBody>
+      </p:sp>
+      <p:sp>
+        <p:nvSpPr>
+          <p:cNvPr id="25" name="TextBox 24"/>
+          <p:cNvSpPr txBox="1"/>
+          <p:nvPr/>
+        </p:nvSpPr>
+        <p:spPr>
+          <a:xfrm>
+            <a:off x="6502552" y="3528662"/>
+            <a:ext cx="1684009" cy="137160"/>
+          </a:xfrm>
+          <a:prstGeom prst="rect">
+            <a:avLst/>
+          </a:prstGeom>
+          <a:noFill/>
+        </p:spPr>
+        <p:txBody>
+          <a:bodyPr wrap="none" lIns="0" rIns="0" tIns="0" bIns="0">
+            <a:normAutofit/>
+          </a:bodyPr>
+          <a:lstStyle/>
+          <a:p>
+            <a:pPr>
+              <a:lnSpc>
+                <a:spcPct val="120000"/>
+              </a:lnSpc>
+            </a:pPr>
+            <a:r>
+              <a:rPr sz="1440" b="1">
+                <a:latin typeface="Microsoft YaHei"/>
+                <a:ea typeface="Microsoft YaHei"/>
+                <a:cs typeface="Microsoft YaHei"/>
+              </a:rPr>
+              <a:t>计时器</a:t>
+            </a:r>
+          </a:p>
+        </p:txBody>
+      </p:sp>
+      <p:sp>
+        <p:nvSpPr>
+          <p:cNvPr id="26" name="TextBox 25"/>
+          <p:cNvSpPr txBox="1"/>
+          <p:nvPr/>
+        </p:nvSpPr>
+        <p:spPr>
+          <a:xfrm>
+            <a:off x="8232281" y="3528662"/>
+            <a:ext cx="1684009" cy="364043"/>
+          </a:xfrm>
+          <a:prstGeom prst="rect">
+            <a:avLst/>
+          </a:prstGeom>
+          <a:noFill/>
+        </p:spPr>
+        <p:txBody>
+          <a:bodyPr wrap="none" lIns="0" rIns="0" tIns="0" bIns="0">
+            <a:normAutofit/>
+          </a:bodyPr>
+          <a:lstStyle/>
+          <a:p>
+            <a:pPr>
+              <a:lnSpc>
+                <a:spcPct val="160000"/>
+              </a:lnSpc>
+            </a:pPr>
+            <a:r>
+              <a:rPr sz="1010" b="0">
+                <a:solidFill>
+                  <a:srgbClr val="334155"/>
+                </a:solidFill>
+                <a:latin typeface="Microsoft YaHei"/>
+                <a:ea typeface="Microsoft YaHei"/>
+                <a:cs typeface="Microsoft YaHei"/>
+              </a:rPr>
+              <a:t>实时计时，帮助你掌控演讲节奏。</a:t>
+            </a:r>
+          </a:p>
+        </p:txBody>
+      </p:sp>
+      <p:sp>
+        <p:nvSpPr>
+          <p:cNvPr id="27" name="TextBox 26"/>
+          <p:cNvSpPr txBox="1"/>
+          <p:nvPr/>
+        </p:nvSpPr>
+        <p:spPr>
+          <a:xfrm>
+            <a:off x="6162192" y="3938426"/>
+            <a:ext cx="294639" cy="166582"/>
+          </a:xfrm>
+          <a:prstGeom prst="rect">
+            <a:avLst/>
+          </a:prstGeom>
+          <a:noFill/>
+        </p:spPr>
+        <p:txBody>
+          <a:bodyPr wrap="none" lIns="0" rIns="0" tIns="0" bIns="0">
+            <a:normAutofit/>
+          </a:bodyPr>
+          <a:lstStyle/>
+          <a:p>
+            <a:pPr>
+              <a:lnSpc>
+                <a:spcPct val="120000"/>
+              </a:lnSpc>
+            </a:pPr>
+            <a:r>
+              <a:rPr sz="1800" b="0">
+                <a:latin typeface="Microsoft YaHei"/>
+                <a:ea typeface="Microsoft YaHei"/>
+                <a:cs typeface="Microsoft YaHei"/>
+              </a:rPr>
+              <a:t>🖥</a:t>
+            </a:r>
+          </a:p>
+        </p:txBody>
+      </p:sp>
+      <p:sp>
+        <p:nvSpPr>
+          <p:cNvPr id="28" name="TextBox 27"/>
+          <p:cNvSpPr txBox="1"/>
+          <p:nvPr/>
+        </p:nvSpPr>
+        <p:spPr>
+          <a:xfrm>
+            <a:off x="6502552" y="3938426"/>
+            <a:ext cx="1684009" cy="137160"/>
+          </a:xfrm>
+          <a:prstGeom prst="rect">
+            <a:avLst/>
+          </a:prstGeom>
+          <a:noFill/>
+        </p:spPr>
+        <p:txBody>
+          <a:bodyPr wrap="none" lIns="0" rIns="0" tIns="0" bIns="0">
+            <a:normAutofit/>
+          </a:bodyPr>
+          <a:lstStyle/>
+          <a:p>
+            <a:pPr>
+              <a:lnSpc>
+                <a:spcPct val="120000"/>
+              </a:lnSpc>
+            </a:pPr>
+            <a:r>
+              <a:rPr sz="1440" b="1">
+                <a:latin typeface="Microsoft YaHei"/>
+                <a:ea typeface="Microsoft YaHei"/>
+                <a:cs typeface="Microsoft YaHei"/>
+              </a:rPr>
+              <a:t>CSS 缩放适配</a:t>
+            </a:r>
+          </a:p>
+        </p:txBody>
+      </p:sp>
+      <p:sp>
+        <p:nvSpPr>
+          <p:cNvPr id="29" name="TextBox 28"/>
+          <p:cNvSpPr txBox="1"/>
+          <p:nvPr/>
+        </p:nvSpPr>
+        <p:spPr>
+          <a:xfrm>
+            <a:off x="8232281" y="3938426"/>
+            <a:ext cx="1684009" cy="546065"/>
+          </a:xfrm>
+          <a:prstGeom prst="rect">
+            <a:avLst/>
+          </a:prstGeom>
+          <a:noFill/>
+        </p:spPr>
+        <p:txBody>
+          <a:bodyPr wrap="square" lIns="0" rIns="0" tIns="0" bIns="0">
+            <a:spAutoFit/>
+          </a:bodyPr>
+          <a:lstStyle/>
+          <a:p>
+            <a:pPr>
+              <a:lnSpc>
+                <a:spcPct val="160000"/>
+              </a:lnSpc>
+            </a:pPr>
+            <a:r>
+              <a:rPr sz="1010" b="0">
+                <a:solidFill>
+                  <a:srgbClr val="334155"/>
+                </a:solidFill>
+                <a:latin typeface="Microsoft YaHei"/>
+                <a:ea typeface="Microsoft YaHei"/>
+                <a:cs typeface="Microsoft YaHei"/>
+              </a:rPr>
+              <a:t>幻灯片按 1440×900 画布设计，CSS 缩放适配任意屏幕，不丢失布局精度。</a:t>
+            </a:r>
+          </a:p>
+        </p:txBody>
+      </p:sp>
+      <p:sp>
+        <p:nvSpPr>
+          <p:cNvPr id="30" name="TextBox 29"/>
           <p:cNvSpPr txBox="1"/>
           <p:nvPr/>
         </p:nvSpPr>
@@ -12546,7 +15116,7 @@
       </p:sp>
       <p:sp>
         <p:nvSpPr>
-          <p:cNvPr id="25" name="Rounded Rectangle 24"/>
+          <p:cNvPr id="31" name="Rounded Rectangle 30"/>
           <p:cNvSpPr/>
           <p:nvPr/>
         </p:nvSpPr>
@@ -12589,7 +15159,7 @@
       </p:sp>
       <p:sp>
         <p:nvSpPr>
-          <p:cNvPr id="26" name="Rounded Rectangle 25"/>
+          <p:cNvPr id="32" name="Rounded Rectangle 31"/>
           <p:cNvSpPr/>
           <p:nvPr/>
         </p:nvSpPr>
@@ -12632,7 +15202,7 @@
       </p:sp>
       <p:sp>
         <p:nvSpPr>
-          <p:cNvPr id="27" name="Rounded Rectangle 26"/>
+          <p:cNvPr id="33" name="Rounded Rectangle 32"/>
           <p:cNvSpPr/>
           <p:nvPr/>
         </p:nvSpPr>
@@ -12675,7 +15245,7 @@
       </p:sp>
       <p:sp>
         <p:nvSpPr>
-          <p:cNvPr id="28" name="Rounded Rectangle 27"/>
+          <p:cNvPr id="34" name="Rounded Rectangle 33"/>
           <p:cNvSpPr/>
           <p:nvPr/>
         </p:nvSpPr>
@@ -12718,7 +15288,7 @@
       </p:sp>
       <p:sp>
         <p:nvSpPr>
-          <p:cNvPr id="29" name="Rounded Rectangle 28"/>
+          <p:cNvPr id="35" name="Rounded Rectangle 34"/>
           <p:cNvSpPr/>
           <p:nvPr/>
         </p:nvSpPr>
@@ -12761,7 +15331,7 @@
       </p:sp>
       <p:sp>
         <p:nvSpPr>
-          <p:cNvPr id="30" name="Rounded Rectangle 29"/>
+          <p:cNvPr id="36" name="Rounded Rectangle 35"/>
           <p:cNvSpPr/>
           <p:nvPr/>
         </p:nvSpPr>
@@ -12804,7 +15374,7 @@
       </p:sp>
       <p:sp>
         <p:nvSpPr>
-          <p:cNvPr id="31" name="Rounded Rectangle 30"/>
+          <p:cNvPr id="37" name="Rounded Rectangle 36"/>
           <p:cNvSpPr/>
           <p:nvPr/>
         </p:nvSpPr>
@@ -12847,7 +15417,7 @@
       </p:sp>
       <p:sp>
         <p:nvSpPr>
-          <p:cNvPr id="32" name="Rounded Rectangle 31"/>
+          <p:cNvPr id="38" name="Rounded Rectangle 37"/>
           <p:cNvSpPr/>
           <p:nvPr/>
         </p:nvSpPr>
@@ -12890,7 +15460,7 @@
       </p:sp>
       <p:sp>
         <p:nvSpPr>
-          <p:cNvPr id="33" name="Rounded Rectangle 32"/>
+          <p:cNvPr id="39" name="Rounded Rectangle 38"/>
           <p:cNvSpPr/>
           <p:nvPr/>
         </p:nvSpPr>
@@ -12933,7 +15503,7 @@
       </p:sp>
       <p:sp>
         <p:nvSpPr>
-          <p:cNvPr id="34" name="Rounded Rectangle 33"/>
+          <p:cNvPr id="40" name="Rounded Rectangle 39"/>
           <p:cNvSpPr/>
           <p:nvPr/>
         </p:nvSpPr>
@@ -13016,7 +15586,7 @@
         </p:nvSpPr>
         <p:spPr>
           <a:xfrm>
-            <a:off x="2369142" y="977760"/>
+            <a:off x="2369142" y="1950177"/>
             <a:ext cx="721360" cy="169333"/>
           </a:xfrm>
           <a:prstGeom prst="roundRect">
@@ -13070,7 +15640,7 @@
         </p:nvSpPr>
         <p:spPr>
           <a:xfrm>
-            <a:off x="2369142" y="977760"/>
+            <a:off x="2369142" y="1950177"/>
             <a:ext cx="721360" cy="169333"/>
           </a:xfrm>
           <a:prstGeom prst="rect">
@@ -13111,7 +15681,7 @@
         </p:nvSpPr>
         <p:spPr>
           <a:xfrm>
-            <a:off x="2369142" y="1231760"/>
+            <a:off x="2369142" y="2204177"/>
             <a:ext cx="7450666" cy="422656"/>
           </a:xfrm>
           <a:prstGeom prst="rect">
@@ -13149,7 +15719,7 @@
         </p:nvSpPr>
         <p:spPr>
           <a:xfrm>
-            <a:off x="2369142" y="1773288"/>
+            <a:off x="2369142" y="2745705"/>
             <a:ext cx="474133" cy="25400"/>
           </a:xfrm>
           <a:prstGeom prst="roundRect">
@@ -13201,12 +15771,12 @@
         </p:nvSpPr>
         <p:spPr>
           <a:xfrm>
-            <a:off x="2370074" y="1917221"/>
-            <a:ext cx="3656685" cy="3525387"/>
+            <a:off x="2370074" y="2889638"/>
+            <a:ext cx="3656685" cy="2135836"/>
           </a:xfrm>
           <a:prstGeom prst="roundRect">
             <a:avLst>
-              <a:gd name="adj" fmla="val 2881"/>
+              <a:gd name="adj" fmla="val 4756"/>
             </a:avLst>
           </a:prstGeom>
           <a:solidFill>
@@ -13253,8 +15823,8 @@
         </p:nvSpPr>
         <p:spPr>
           <a:xfrm>
-            <a:off x="2581740" y="2086554"/>
-            <a:ext cx="3241818" cy="528187"/>
+            <a:off x="2581740" y="3058971"/>
+            <a:ext cx="3241818" cy="264093"/>
           </a:xfrm>
           <a:prstGeom prst="rect">
             <a:avLst/>
@@ -13291,8 +15861,8 @@
         </p:nvSpPr>
         <p:spPr>
           <a:xfrm>
-            <a:off x="2370074" y="2660462"/>
-            <a:ext cx="1435753" cy="457200"/>
+            <a:off x="2581740" y="3368785"/>
+            <a:ext cx="1276185" cy="241401"/>
           </a:xfrm>
           <a:prstGeom prst="rect">
             <a:avLst/>
@@ -13340,8 +15910,8 @@
         </p:nvSpPr>
         <p:spPr>
           <a:xfrm>
-            <a:off x="3805827" y="2660462"/>
-            <a:ext cx="2220931" cy="457200"/>
+            <a:off x="3857926" y="3368785"/>
+            <a:ext cx="1974099" cy="241401"/>
           </a:xfrm>
           <a:prstGeom prst="rect">
             <a:avLst/>
@@ -13392,8 +15962,8 @@
         </p:nvSpPr>
         <p:spPr>
           <a:xfrm>
-            <a:off x="2370074" y="3117662"/>
-            <a:ext cx="1435753" cy="457200"/>
+            <a:off x="2581740" y="3610187"/>
+            <a:ext cx="1276185" cy="241401"/>
           </a:xfrm>
           <a:prstGeom prst="rect">
             <a:avLst/>
@@ -13441,8 +16011,8 @@
         </p:nvSpPr>
         <p:spPr>
           <a:xfrm>
-            <a:off x="3805827" y="3117662"/>
-            <a:ext cx="2220931" cy="457200"/>
+            <a:off x="3857926" y="3610187"/>
+            <a:ext cx="1974099" cy="241401"/>
           </a:xfrm>
           <a:prstGeom prst="rect">
             <a:avLst/>
@@ -13493,8 +16063,8 @@
         </p:nvSpPr>
         <p:spPr>
           <a:xfrm>
-            <a:off x="2370074" y="3574862"/>
-            <a:ext cx="1435753" cy="457200"/>
+            <a:off x="2581740" y="3851589"/>
+            <a:ext cx="1276185" cy="241401"/>
           </a:xfrm>
           <a:prstGeom prst="rect">
             <a:avLst/>
@@ -13542,8 +16112,8 @@
         </p:nvSpPr>
         <p:spPr>
           <a:xfrm>
-            <a:off x="3805827" y="3574862"/>
-            <a:ext cx="2220931" cy="457200"/>
+            <a:off x="3857926" y="3851589"/>
+            <a:ext cx="1974099" cy="241401"/>
           </a:xfrm>
           <a:prstGeom prst="rect">
             <a:avLst/>
@@ -13594,8 +16164,8 @@
         </p:nvSpPr>
         <p:spPr>
           <a:xfrm>
-            <a:off x="2370074" y="4032062"/>
-            <a:ext cx="1435753" cy="457200"/>
+            <a:off x="2581740" y="4092990"/>
+            <a:ext cx="1276185" cy="241401"/>
           </a:xfrm>
           <a:prstGeom prst="rect">
             <a:avLst/>
@@ -13643,8 +16213,8 @@
         </p:nvSpPr>
         <p:spPr>
           <a:xfrm>
-            <a:off x="3805827" y="4032062"/>
-            <a:ext cx="2220931" cy="457200"/>
+            <a:off x="3857926" y="4092990"/>
+            <a:ext cx="1974099" cy="241401"/>
           </a:xfrm>
           <a:prstGeom prst="rect">
             <a:avLst/>
@@ -13695,8 +16265,8 @@
         </p:nvSpPr>
         <p:spPr>
           <a:xfrm>
-            <a:off x="2370074" y="4489262"/>
-            <a:ext cx="1435753" cy="457200"/>
+            <a:off x="2581740" y="4334392"/>
+            <a:ext cx="1276185" cy="241401"/>
           </a:xfrm>
           <a:prstGeom prst="rect">
             <a:avLst/>
@@ -13744,8 +16314,8 @@
         </p:nvSpPr>
         <p:spPr>
           <a:xfrm>
-            <a:off x="3805827" y="4489262"/>
-            <a:ext cx="2220931" cy="457200"/>
+            <a:off x="3857926" y="4334392"/>
+            <a:ext cx="1974099" cy="241401"/>
           </a:xfrm>
           <a:prstGeom prst="rect">
             <a:avLst/>
@@ -13796,8 +16366,8 @@
         </p:nvSpPr>
         <p:spPr>
           <a:xfrm>
-            <a:off x="2370074" y="4946462"/>
-            <a:ext cx="1435753" cy="457200"/>
+            <a:off x="2581740" y="4575793"/>
+            <a:ext cx="1276185" cy="241401"/>
           </a:xfrm>
           <a:prstGeom prst="rect">
             <a:avLst/>
@@ -13845,8 +16415,8 @@
         </p:nvSpPr>
         <p:spPr>
           <a:xfrm>
-            <a:off x="3805827" y="4946462"/>
-            <a:ext cx="2220931" cy="457200"/>
+            <a:off x="3857926" y="4575793"/>
+            <a:ext cx="1974099" cy="241401"/>
           </a:xfrm>
           <a:prstGeom prst="rect">
             <a:avLst/>
@@ -13897,12 +16467,12 @@
         </p:nvSpPr>
         <p:spPr>
           <a:xfrm>
-            <a:off x="6162192" y="1917221"/>
-            <a:ext cx="3656685" cy="3261293"/>
+            <a:off x="6162192" y="2889638"/>
+            <a:ext cx="3656685" cy="2135836"/>
           </a:xfrm>
           <a:prstGeom prst="roundRect">
             <a:avLst>
-              <a:gd name="adj" fmla="val 3115"/>
+              <a:gd name="adj" fmla="val 4756"/>
             </a:avLst>
           </a:prstGeom>
           <a:solidFill>
@@ -13949,7 +16519,7 @@
         </p:nvSpPr>
         <p:spPr>
           <a:xfrm>
-            <a:off x="6373859" y="2086554"/>
+            <a:off x="6373859" y="3058971"/>
             <a:ext cx="3241818" cy="264093"/>
           </a:xfrm>
           <a:prstGeom prst="rect">
@@ -13987,8 +16557,8 @@
         </p:nvSpPr>
         <p:spPr>
           <a:xfrm>
-            <a:off x="6162192" y="2396368"/>
-            <a:ext cx="1858694" cy="457200"/>
+            <a:off x="6373859" y="3368785"/>
+            <a:ext cx="1652121" cy="241401"/>
           </a:xfrm>
           <a:prstGeom prst="rect">
             <a:avLst/>
@@ -14036,8 +16606,8 @@
         </p:nvSpPr>
         <p:spPr>
           <a:xfrm>
-            <a:off x="8020887" y="2396368"/>
-            <a:ext cx="1797990" cy="457200"/>
+            <a:off x="8025980" y="3368785"/>
+            <a:ext cx="1598164" cy="241401"/>
           </a:xfrm>
           <a:prstGeom prst="rect">
             <a:avLst/>
@@ -14088,8 +16658,8 @@
         </p:nvSpPr>
         <p:spPr>
           <a:xfrm>
-            <a:off x="6162192" y="2853568"/>
-            <a:ext cx="1858694" cy="457200"/>
+            <a:off x="6373859" y="3610187"/>
+            <a:ext cx="1652121" cy="241401"/>
           </a:xfrm>
           <a:prstGeom prst="rect">
             <a:avLst/>
@@ -14137,8 +16707,8 @@
         </p:nvSpPr>
         <p:spPr>
           <a:xfrm>
-            <a:off x="8020887" y="2853568"/>
-            <a:ext cx="1797990" cy="457200"/>
+            <a:off x="8025980" y="3610187"/>
+            <a:ext cx="1598164" cy="241401"/>
           </a:xfrm>
           <a:prstGeom prst="rect">
             <a:avLst/>
@@ -14189,8 +16759,8 @@
         </p:nvSpPr>
         <p:spPr>
           <a:xfrm>
-            <a:off x="6162192" y="3310768"/>
-            <a:ext cx="1858694" cy="457200"/>
+            <a:off x="6373859" y="3851589"/>
+            <a:ext cx="1652121" cy="241401"/>
           </a:xfrm>
           <a:prstGeom prst="rect">
             <a:avLst/>
@@ -14238,8 +16808,8 @@
         </p:nvSpPr>
         <p:spPr>
           <a:xfrm>
-            <a:off x="8020887" y="3310768"/>
-            <a:ext cx="1797990" cy="457200"/>
+            <a:off x="8025980" y="3851589"/>
+            <a:ext cx="1598164" cy="241401"/>
           </a:xfrm>
           <a:prstGeom prst="rect">
             <a:avLst/>
@@ -14290,8 +16860,8 @@
         </p:nvSpPr>
         <p:spPr>
           <a:xfrm>
-            <a:off x="6162192" y="3767968"/>
-            <a:ext cx="1858694" cy="457200"/>
+            <a:off x="6373859" y="4092990"/>
+            <a:ext cx="1652121" cy="241401"/>
           </a:xfrm>
           <a:prstGeom prst="rect">
             <a:avLst/>
@@ -14339,8 +16909,8 @@
         </p:nvSpPr>
         <p:spPr>
           <a:xfrm>
-            <a:off x="8020887" y="3767968"/>
-            <a:ext cx="1797990" cy="457200"/>
+            <a:off x="8025980" y="4092990"/>
+            <a:ext cx="1598164" cy="241401"/>
           </a:xfrm>
           <a:prstGeom prst="rect">
             <a:avLst/>
@@ -14391,8 +16961,8 @@
         </p:nvSpPr>
         <p:spPr>
           <a:xfrm>
-            <a:off x="6162192" y="4225168"/>
-            <a:ext cx="1858694" cy="457200"/>
+            <a:off x="6373859" y="4334392"/>
+            <a:ext cx="1652121" cy="241401"/>
           </a:xfrm>
           <a:prstGeom prst="rect">
             <a:avLst/>
@@ -14440,8 +17010,8 @@
         </p:nvSpPr>
         <p:spPr>
           <a:xfrm>
-            <a:off x="8020887" y="4225168"/>
-            <a:ext cx="1797990" cy="457200"/>
+            <a:off x="8025980" y="4334392"/>
+            <a:ext cx="1598164" cy="241401"/>
           </a:xfrm>
           <a:prstGeom prst="rect">
             <a:avLst/>
@@ -14492,8 +17062,8 @@
         </p:nvSpPr>
         <p:spPr>
           <a:xfrm>
-            <a:off x="6162192" y="4682368"/>
-            <a:ext cx="1858694" cy="457200"/>
+            <a:off x="6373859" y="4575793"/>
+            <a:ext cx="1652121" cy="241401"/>
           </a:xfrm>
           <a:prstGeom prst="rect">
             <a:avLst/>
@@ -14541,8 +17111,8 @@
         </p:nvSpPr>
         <p:spPr>
           <a:xfrm>
-            <a:off x="8020887" y="4682368"/>
-            <a:ext cx="1797990" cy="457200"/>
+            <a:off x="8025980" y="4575793"/>
+            <a:ext cx="1598164" cy="241401"/>
           </a:xfrm>
           <a:prstGeom prst="rect">
             <a:avLst/>
@@ -14593,8 +17163,8 @@
         </p:nvSpPr>
         <p:spPr>
           <a:xfrm>
-            <a:off x="2335275" y="5698641"/>
-            <a:ext cx="169333" cy="940550"/>
+            <a:off x="2335275" y="5281507"/>
+            <a:ext cx="169333" cy="385267"/>
           </a:xfrm>
           <a:prstGeom prst="roundRect">
             <a:avLst>
@@ -14645,12 +17215,12 @@
         </p:nvSpPr>
         <p:spPr>
           <a:xfrm>
-            <a:off x="2369142" y="5698641"/>
-            <a:ext cx="7450666" cy="940550"/>
+            <a:off x="2369142" y="5281507"/>
+            <a:ext cx="7450666" cy="385267"/>
           </a:xfrm>
           <a:prstGeom prst="roundRect">
             <a:avLst>
-              <a:gd name="adj" fmla="val 10802"/>
+              <a:gd name="adj" fmla="val 26371"/>
             </a:avLst>
           </a:prstGeom>
           <a:solidFill>
@@ -14697,8 +17267,8 @@
         </p:nvSpPr>
         <p:spPr>
           <a:xfrm>
-            <a:off x="9811342" y="5698641"/>
-            <a:ext cx="8466" cy="940550"/>
+            <a:off x="9811342" y="5281507"/>
+            <a:ext cx="8466" cy="385267"/>
           </a:xfrm>
           <a:prstGeom prst="rect">
             <a:avLst/>
@@ -14740,7 +17310,7 @@
         </p:nvSpPr>
         <p:spPr>
           <a:xfrm>
-            <a:off x="2369142" y="5698641"/>
+            <a:off x="2369142" y="5281507"/>
             <a:ext cx="7450666" cy="8466"/>
           </a:xfrm>
           <a:prstGeom prst="rect">
@@ -14783,8 +17353,8 @@
         </p:nvSpPr>
         <p:spPr>
           <a:xfrm>
-            <a:off x="2369142" y="5698641"/>
-            <a:ext cx="7450666" cy="940550"/>
+            <a:off x="2369142" y="5281507"/>
+            <a:ext cx="7450666" cy="385267"/>
           </a:xfrm>
           <a:prstGeom prst="rect">
             <a:avLst/>
@@ -15343,7 +17913,7 @@
         </p:nvSpPr>
         <p:spPr>
           <a:xfrm>
-            <a:off x="2453809" y="1805379"/>
+            <a:off x="2453809" y="1823314"/>
             <a:ext cx="589279" cy="169333"/>
           </a:xfrm>
           <a:prstGeom prst="roundRect">
@@ -15397,7 +17967,7 @@
         </p:nvSpPr>
         <p:spPr>
           <a:xfrm>
-            <a:off x="2453809" y="1805379"/>
+            <a:off x="2453809" y="1823314"/>
             <a:ext cx="589279" cy="169333"/>
           </a:xfrm>
           <a:prstGeom prst="rect">
@@ -15438,7 +18008,7 @@
         </p:nvSpPr>
         <p:spPr>
           <a:xfrm>
-            <a:off x="2453809" y="2093246"/>
+            <a:off x="2453809" y="2111180"/>
             <a:ext cx="7281333" cy="422656"/>
           </a:xfrm>
           <a:prstGeom prst="rect">
@@ -15476,7 +18046,7 @@
         </p:nvSpPr>
         <p:spPr>
           <a:xfrm>
-            <a:off x="2453809" y="2634774"/>
+            <a:off x="2453809" y="2652708"/>
             <a:ext cx="474133" cy="25400"/>
           </a:xfrm>
           <a:prstGeom prst="roundRect">
@@ -15528,12 +18098,12 @@
         </p:nvSpPr>
         <p:spPr>
           <a:xfrm>
-            <a:off x="2454719" y="2778707"/>
-            <a:ext cx="3572040" cy="1992984"/>
+            <a:off x="2454719" y="2796642"/>
+            <a:ext cx="3572040" cy="2355696"/>
           </a:xfrm>
           <a:prstGeom prst="roundRect">
             <a:avLst>
-              <a:gd name="adj" fmla="val 5097"/>
+              <a:gd name="adj" fmla="val 4312"/>
             </a:avLst>
           </a:prstGeom>
           <a:solidFill>
@@ -15580,7 +18150,7 @@
         </p:nvSpPr>
         <p:spPr>
           <a:xfrm>
-            <a:off x="2666386" y="2948041"/>
+            <a:off x="2666386" y="2965975"/>
             <a:ext cx="3157173" cy="264093"/>
           </a:xfrm>
           <a:prstGeom prst="rect">
@@ -15618,7 +18188,7 @@
         </p:nvSpPr>
         <p:spPr>
           <a:xfrm>
-            <a:off x="2666386" y="3257855"/>
+            <a:off x="2666386" y="3275789"/>
             <a:ext cx="3157173" cy="227527"/>
           </a:xfrm>
           <a:prstGeom prst="rect">
@@ -15681,7 +18251,7 @@
         </p:nvSpPr>
         <p:spPr>
           <a:xfrm>
-            <a:off x="2666386" y="3531102"/>
+            <a:off x="2666386" y="3562583"/>
             <a:ext cx="3157173" cy="227527"/>
           </a:xfrm>
           <a:prstGeom prst="rect">
@@ -15744,7 +18314,7 @@
         </p:nvSpPr>
         <p:spPr>
           <a:xfrm>
-            <a:off x="2666386" y="3804349"/>
+            <a:off x="2666386" y="3849376"/>
             <a:ext cx="3157173" cy="227527"/>
           </a:xfrm>
           <a:prstGeom prst="rect">
@@ -15807,7 +18377,7 @@
         </p:nvSpPr>
         <p:spPr>
           <a:xfrm>
-            <a:off x="2666386" y="4077596"/>
+            <a:off x="2666386" y="4136170"/>
             <a:ext cx="3157173" cy="227527"/>
           </a:xfrm>
           <a:prstGeom prst="rect">
@@ -15870,7 +18440,7 @@
         </p:nvSpPr>
         <p:spPr>
           <a:xfrm>
-            <a:off x="2666386" y="4350843"/>
+            <a:off x="2666386" y="4422964"/>
             <a:ext cx="3157173" cy="227527"/>
           </a:xfrm>
           <a:prstGeom prst="rect">
@@ -15933,7 +18503,7 @@
         </p:nvSpPr>
         <p:spPr>
           <a:xfrm>
-            <a:off x="2666386" y="4624090"/>
+            <a:off x="2666386" y="4709758"/>
             <a:ext cx="3157173" cy="227527"/>
           </a:xfrm>
           <a:prstGeom prst="rect">
@@ -15996,12 +18566,12 @@
         </p:nvSpPr>
         <p:spPr>
           <a:xfrm>
-            <a:off x="6162192" y="2778707"/>
-            <a:ext cx="3572040" cy="1992984"/>
+            <a:off x="6162192" y="2796642"/>
+            <a:ext cx="3572040" cy="2355696"/>
           </a:xfrm>
           <a:prstGeom prst="roundRect">
             <a:avLst>
-              <a:gd name="adj" fmla="val 5097"/>
+              <a:gd name="adj" fmla="val 4312"/>
             </a:avLst>
           </a:prstGeom>
           <a:solidFill>
@@ -16048,7 +18618,7 @@
         </p:nvSpPr>
         <p:spPr>
           <a:xfrm>
-            <a:off x="6373859" y="2948041"/>
+            <a:off x="6373859" y="2965975"/>
             <a:ext cx="3157173" cy="264093"/>
           </a:xfrm>
           <a:prstGeom prst="rect">
@@ -16086,7 +18656,7 @@
         </p:nvSpPr>
         <p:spPr>
           <a:xfrm>
-            <a:off x="6373859" y="3257855"/>
+            <a:off x="6373859" y="3275789"/>
             <a:ext cx="3157173" cy="227527"/>
           </a:xfrm>
           <a:prstGeom prst="rect">
@@ -16149,7 +18719,7 @@
         </p:nvSpPr>
         <p:spPr>
           <a:xfrm>
-            <a:off x="6373859" y="3531102"/>
+            <a:off x="6373859" y="3562583"/>
             <a:ext cx="3157173" cy="227527"/>
           </a:xfrm>
           <a:prstGeom prst="rect">
@@ -16212,7 +18782,7 @@
         </p:nvSpPr>
         <p:spPr>
           <a:xfrm>
-            <a:off x="6373859" y="3804349"/>
+            <a:off x="6373859" y="3849376"/>
             <a:ext cx="3157173" cy="227527"/>
           </a:xfrm>
           <a:prstGeom prst="rect">
@@ -16275,7 +18845,7 @@
         </p:nvSpPr>
         <p:spPr>
           <a:xfrm>
-            <a:off x="6373859" y="4077596"/>
+            <a:off x="6373859" y="4136170"/>
             <a:ext cx="3157173" cy="227527"/>
           </a:xfrm>
           <a:prstGeom prst="rect">
@@ -16338,7 +18908,7 @@
         </p:nvSpPr>
         <p:spPr>
           <a:xfrm>
-            <a:off x="6373859" y="4350843"/>
+            <a:off x="6373859" y="4422964"/>
             <a:ext cx="3157173" cy="227527"/>
           </a:xfrm>
           <a:prstGeom prst="rect">
@@ -16401,7 +18971,7 @@
         </p:nvSpPr>
         <p:spPr>
           <a:xfrm>
-            <a:off x="6373859" y="4624090"/>
+            <a:off x="6373859" y="4709758"/>
             <a:ext cx="3157173" cy="227527"/>
           </a:xfrm>
           <a:prstGeom prst="rect">
@@ -16464,8 +19034,8 @@
         </p:nvSpPr>
         <p:spPr>
           <a:xfrm>
-            <a:off x="2419942" y="5107649"/>
-            <a:ext cx="169333" cy="703922"/>
+            <a:off x="2419942" y="5408370"/>
+            <a:ext cx="169333" cy="385267"/>
           </a:xfrm>
           <a:prstGeom prst="roundRect">
             <a:avLst>
@@ -16516,12 +19086,12 @@
         </p:nvSpPr>
         <p:spPr>
           <a:xfrm>
-            <a:off x="2453809" y="5107649"/>
-            <a:ext cx="7281333" cy="703922"/>
+            <a:off x="2453809" y="5408370"/>
+            <a:ext cx="7281333" cy="385267"/>
           </a:xfrm>
           <a:prstGeom prst="roundRect">
             <a:avLst>
-              <a:gd name="adj" fmla="val 14433"/>
+              <a:gd name="adj" fmla="val 26371"/>
             </a:avLst>
           </a:prstGeom>
           <a:solidFill>
@@ -16568,8 +19138,8 @@
         </p:nvSpPr>
         <p:spPr>
           <a:xfrm>
-            <a:off x="9726676" y="5107649"/>
-            <a:ext cx="8466" cy="703922"/>
+            <a:off x="9726676" y="5408370"/>
+            <a:ext cx="8466" cy="385267"/>
           </a:xfrm>
           <a:prstGeom prst="rect">
             <a:avLst/>
@@ -16611,7 +19181,7 @@
         </p:nvSpPr>
         <p:spPr>
           <a:xfrm>
-            <a:off x="2453809" y="5107649"/>
+            <a:off x="2453809" y="5408370"/>
             <a:ext cx="7281333" cy="8466"/>
           </a:xfrm>
           <a:prstGeom prst="rect">
@@ -16654,8 +19224,8 @@
         </p:nvSpPr>
         <p:spPr>
           <a:xfrm>
-            <a:off x="2453809" y="5107649"/>
-            <a:ext cx="7281333" cy="703922"/>
+            <a:off x="2453809" y="5408370"/>
+            <a:ext cx="7281333" cy="385267"/>
           </a:xfrm>
           <a:prstGeom prst="rect">
             <a:avLst/>
